--- a/presentation/Week3_汇报_刘宇轩_苏宇垚.pptx
+++ b/presentation/Week3_汇报_刘宇轩_苏宇垚.pptx
@@ -3112,6 +3112,13 @@
           <a:bodyPr/>
           <a:lstStyle/>
           <a:p>
+            <a:pPr>
+              <a:defRPr sz="3600" b="1">
+                <a:solidFill>
+                  <a:srgbClr val="003366"/>
+                </a:solidFill>
+              </a:defRPr>
+            </a:pPr>
             <a:r>
               <a:t>招股书股本结构自动化抽取</a:t>
             </a:r>
@@ -3133,14 +3140,16 @@
           <a:bodyPr/>
           <a:lstStyle/>
           <a:p>
+            <a:pPr>
+              <a:defRPr sz="1800"/>
+            </a:pPr>
             <a:r>
               <a:t>刘宇轩 &amp; 苏宇垚 | C组（科创板）</a:t>
             </a:r>
           </a:p>
-          <a:p/>
-          <a:p>
-            <a:r>
-              <a:t>从PDF到结构化数据的三周实践</a:t>
+          <a:p>
+            <a:r>
+              <a:t>Week 3 汇报 — 从PDF到结构化数据</a:t>
             </a:r>
           </a:p>
         </p:txBody>
@@ -3179,14 +3188,14 @@
           <a:lstStyle/>
           <a:p>
             <a:pPr>
-              <a:defRPr sz="3200" b="1">
+              <a:defRPr sz="3000" b="1">
                 <a:solidFill>
                   <a:srgbClr val="003366"/>
                 </a:solidFill>
               </a:defRPr>
             </a:pPr>
             <a:r>
-              <a:t>我们学到了什么</a:t>
+              <a:t>给以后的话 — 技术资产</a:t>
             </a:r>
           </a:p>
         </p:txBody>
@@ -3209,75 +3218,75 @@
           <a:p>
             <a:pPr>
               <a:spcAft>
-                <a:spcPts val="800"/>
-              </a:spcAft>
-              <a:defRPr sz="1800"/>
-            </a:pPr>
-            <a:r>
-              <a:t>1. "香肠理论"是对的 — 每一步只做一件事，验证通过再往下走</a:t>
-            </a:r>
-          </a:p>
-          <a:p>
-            <a:pPr>
-              <a:spcAft>
-                <a:spcPts val="800"/>
-              </a:spcAft>
-              <a:defRPr sz="1800"/>
-            </a:pPr>
-            <a:r>
-              <a:t>2. AI能抽框架，抽不准表格里的数字 — 需要人工复核兜底</a:t>
-            </a:r>
-          </a:p>
-          <a:p>
-            <a:pPr>
-              <a:spcAft>
-                <a:spcPts val="800"/>
-              </a:spcAft>
-              <a:defRPr sz="1800"/>
-            </a:pPr>
-            <a:r>
-              <a:t>3. 校验比抽取更重要 — row_match.csv 告诉我们哪里有差异</a:t>
-            </a:r>
-          </a:p>
-          <a:p>
-            <a:pPr>
-              <a:spcAft>
-                <a:spcPts val="800"/>
-              </a:spcAft>
-              <a:defRPr sz="1800"/>
-            </a:pPr>
-            <a:r>
-              <a:t>4. MinerU页码范围 = 数据质量上限 — 不能随便填</a:t>
-            </a:r>
-          </a:p>
-          <a:p>
-            <a:pPr>
-              <a:spcAft>
-                <a:spcPts val="800"/>
-              </a:spcAft>
-              <a:defRPr sz="1800"/>
-            </a:pPr>
-            <a:r>
-              <a:t>5. Git规范 ≠ 任务完成 — 主动做差异分析才是研究型数据工作</a:t>
-            </a:r>
-          </a:p>
-          <a:p>
-            <a:pPr>
-              <a:spcAft>
-                <a:spcPts val="800"/>
-              </a:spcAft>
-              <a:defRPr sz="1800"/>
-            </a:pPr>
-          </a:p>
-          <a:p>
-            <a:pPr>
-              <a:spcAft>
-                <a:spcPts val="800"/>
-              </a:spcAft>
-              <a:defRPr sz="1800"/>
-            </a:pPr>
-            <a:r>
-              <a:t>下一步：补全38条人工复核 + 扩展到50家公司验证可迁移性</a:t>
+                <a:spcPts val="600"/>
+              </a:spcAft>
+              <a:defRPr sz="1800"/>
+            </a:pPr>
+            <a:r>
+              <a:t>完整流水线文档：source_notes/technical_summary.md</a:t>
+            </a:r>
+          </a:p>
+          <a:p>
+            <a:pPr>
+              <a:spcAft>
+                <a:spcPts val="600"/>
+              </a:spcAft>
+              <a:defRPr sz="1800"/>
+            </a:pPr>
+            <a:r>
+              <a:t>一键运行脚本：cninfo_spider.py → MinerU → extract → validate → Excel</a:t>
+            </a:r>
+          </a:p>
+          <a:p>
+            <a:pPr>
+              <a:spcAft>
+                <a:spcPts val="600"/>
+              </a:spcAft>
+              <a:defRPr sz="1800"/>
+            </a:pPr>
+            <a:r>
+              <a:t>TOC定位法：任意招股书通用，先找目录再定位章节</a:t>
+            </a:r>
+          </a:p>
+          <a:p>
+            <a:pPr>
+              <a:spcAft>
+                <a:spcPts val="600"/>
+              </a:spcAft>
+              <a:defRPr sz="1800"/>
+            </a:pPr>
+            <a:r>
+              <a:t>密度评分+分轮调用：解决大文本+大数据量问题</a:t>
+            </a:r>
+          </a:p>
+          <a:p>
+            <a:pPr>
+              <a:spcAft>
+                <a:spcPts val="600"/>
+              </a:spcAft>
+              <a:defRPr sz="1800"/>
+            </a:pPr>
+            <a:r>
+              <a:t>null值三板斧：evidence提取 → 坐标重建 → 人工Markdown</a:t>
+            </a:r>
+          </a:p>
+          <a:p>
+            <a:pPr>
+              <a:spcAft>
+                <a:spcPts val="600"/>
+              </a:spcAft>
+              <a:defRPr sz="1800"/>
+            </a:pPr>
+          </a:p>
+          <a:p>
+            <a:pPr>
+              <a:spcAft>
+                <a:spcPts val="600"/>
+              </a:spcAft>
+              <a:defRPr sz="1800"/>
+            </a:pPr>
+            <a:r>
+              <a:t>扩展到50家只需：修改公司列表 → 批量MinerU → 批量提取</a:t>
             </a:r>
           </a:p>
         </p:txBody>
@@ -3316,14 +3325,14 @@
           <a:lstStyle/>
           <a:p>
             <a:pPr>
-              <a:defRPr sz="3200" b="1">
+              <a:defRPr sz="3000" b="1">
                 <a:solidFill>
                   <a:srgbClr val="003366"/>
                 </a:solidFill>
               </a:defRPr>
             </a:pPr>
             <a:r>
-              <a:t>我们的任务</a:t>
+              <a:t>我们搭的流水线</a:t>
             </a:r>
           </a:p>
         </p:txBody>
@@ -3346,45 +3355,78 @@
           <a:p>
             <a:pPr>
               <a:spcAft>
-                <a:spcPts val="800"/>
-              </a:spcAft>
-              <a:defRPr sz="1800"/>
-            </a:pPr>
-            <a:r>
-              <a:t>输入：8份 IPO 招股书 PDF（主板/创业板/科创板/北交所各2家）</a:t>
-            </a:r>
-          </a:p>
-          <a:p>
-            <a:pPr>
-              <a:spcAft>
-                <a:spcPts val="800"/>
-              </a:spcAft>
-              <a:defRPr sz="1800"/>
-            </a:pPr>
-            <a:r>
-              <a:t>输出：每家公司 3 张表 → 认缴流量 / 股权结构存量 / 股权转让</a:t>
-            </a:r>
-          </a:p>
-          <a:p>
-            <a:pPr>
-              <a:spcAft>
-                <a:spcPts val="800"/>
-              </a:spcAft>
-              <a:defRPr sz="1800"/>
-            </a:pPr>
-            <a:r>
-              <a:t>核心要求：每个数字都能回到 PDF 原文和页码</a:t>
-            </a:r>
-          </a:p>
-          <a:p>
-            <a:pPr>
-              <a:spcAft>
-                <a:spcPts val="800"/>
-              </a:spcAft>
-              <a:defRPr sz="1800"/>
-            </a:pPr>
-            <a:r>
-              <a:t>校验标准：Pydantic Schema + 数值 Cross-check</a:t>
+                <a:spcPts val="600"/>
+              </a:spcAft>
+              <a:defRPr sz="1800"/>
+            </a:pPr>
+            <a:r>
+              <a:t>① PDF下载 — cninfo 巨潮爬虫（Session + UA轮换 + 反爬重试）</a:t>
+            </a:r>
+          </a:p>
+          <a:p>
+            <a:pPr>
+              <a:spcAft>
+                <a:spcPts val="600"/>
+              </a:spcAft>
+              <a:defRPr sz="1800"/>
+            </a:pPr>
+            <a:r>
+              <a:t>② MinerU 解析 — PDF → 结构化JSON（保留页码+坐标）</a:t>
+            </a:r>
+          </a:p>
+          <a:p>
+            <a:pPr>
+              <a:spcAft>
+                <a:spcPts val="600"/>
+              </a:spcAft>
+              <a:defRPr sz="1800"/>
+            </a:pPr>
+            <a:r>
+              <a:t>③ TOC目录定位 — 先解析目录页，精准找到'发行人基本情况'起始页（核心创新）</a:t>
+            </a:r>
+          </a:p>
+          <a:p>
+            <a:pPr>
+              <a:spcAft>
+                <a:spcPts val="600"/>
+              </a:spcAft>
+              <a:defRPr sz="1800"/>
+            </a:pPr>
+            <a:r>
+              <a:t>④ 章节精准提取 — 只提取目标章节页面，不全文输入</a:t>
+            </a:r>
+          </a:p>
+          <a:p>
+            <a:pPr>
+              <a:spcAft>
+                <a:spcPts val="600"/>
+              </a:spcAft>
+              <a:defRPr sz="1800"/>
+            </a:pPr>
+            <a:r>
+              <a:t>⑤ 关键词密度评分 — 75K→48K字符，信息密度提升10倍</a:t>
+            </a:r>
+          </a:p>
+          <a:p>
+            <a:pPr>
+              <a:spcAft>
+                <a:spcPts val="600"/>
+              </a:spcAft>
+              <a:defRPr sz="1800"/>
+            </a:pPr>
+            <a:r>
+              <a:t>⑥ Deepseek AI 抽取 — Temperature=0.1，数据大时分轮调用</a:t>
+            </a:r>
+          </a:p>
+          <a:p>
+            <a:pPr>
+              <a:spcAft>
+                <a:spcPts val="600"/>
+              </a:spcAft>
+              <a:defRPr sz="1800"/>
+            </a:pPr>
+            <a:r>
+              <a:t>⑦ Pydantic Schema 校验 + 数值 Cross-check + 人工复核</a:t>
             </a:r>
           </a:p>
         </p:txBody>
@@ -3423,14 +3465,14 @@
           <a:lstStyle/>
           <a:p>
             <a:pPr>
-              <a:defRPr sz="3200" b="1">
+              <a:defRPr sz="3000" b="1">
                 <a:solidFill>
                   <a:srgbClr val="003366"/>
                 </a:solidFill>
               </a:defRPr>
             </a:pPr>
             <a:r>
-              <a:t>自动化流水线</a:t>
+              <a:t>踩坑1：MinerU 页码范围决定一切</a:t>
             </a:r>
           </a:p>
         </p:txBody>
@@ -3453,78 +3495,75 @@
           <a:p>
             <a:pPr>
               <a:spcAft>
-                <a:spcPts val="800"/>
-              </a:spcAft>
-              <a:defRPr sz="1800"/>
-            </a:pPr>
-            <a:r>
-              <a:t>① PDF下载 — cninfo 巨潮资讯网爬虫（Session Cookie + UA轮换 + 反爬重试）</a:t>
-            </a:r>
-          </a:p>
-          <a:p>
-            <a:pPr>
-              <a:spcAft>
-                <a:spcPts val="800"/>
-              </a:spcAft>
-              <a:defRPr sz="1800"/>
-            </a:pPr>
-            <a:r>
-              <a:t>② MinerU 解析 — PDF → 结构化文本（保留页码标记）</a:t>
-            </a:r>
-          </a:p>
-          <a:p>
-            <a:pPr>
-              <a:spcAft>
-                <a:spcPts val="800"/>
-              </a:spcAft>
-              <a:defRPr sz="1800"/>
-            </a:pPr>
-            <a:r>
-              <a:t>③ 章节定位 — 关键词密度评分（75K → 48K，信息密度提升10倍）</a:t>
-            </a:r>
-          </a:p>
-          <a:p>
-            <a:pPr>
-              <a:spcAft>
-                <a:spcPts val="800"/>
-              </a:spcAft>
-              <a:defRPr sz="1800"/>
-            </a:pPr>
-            <a:r>
-              <a:t>④ Deepseek AI 抽取 — Temperature=0.1，分轮调用避免截断</a:t>
-            </a:r>
-          </a:p>
-          <a:p>
-            <a:pPr>
-              <a:spcAft>
-                <a:spcPts val="800"/>
-              </a:spcAft>
-              <a:defRPr sz="1800"/>
-            </a:pPr>
-            <a:r>
-              <a:t>⑤ Pydantic Schema 校验 — 字段类型/必填项/持股比例范围检查</a:t>
-            </a:r>
-          </a:p>
-          <a:p>
-            <a:pPr>
-              <a:spcAft>
-                <a:spcPts val="800"/>
-              </a:spcAft>
-              <a:defRPr sz="1800"/>
-            </a:pPr>
-            <a:r>
-              <a:t>⑥ 数值 Cross-check — 48条带数字记录，每次增资前后股本核验</a:t>
-            </a:r>
-          </a:p>
-          <a:p>
-            <a:pPr>
-              <a:spcAft>
-                <a:spcPts val="800"/>
-              </a:spcAft>
-              <a:defRPr sz="1800"/>
-            </a:pPr>
-            <a:r>
-              <a:t>⑦ 人工复核队列 — 38条标记 unchecked，含具体问题和PDF页码</a:t>
+                <a:spcPts val="600"/>
+              </a:spcAft>
+              <a:defRPr sz="1800"/>
+            </a:pPr>
+            <a:r>
+              <a:t>三协电机第一次上传：200页解析完，全是财务会计和附录</a:t>
+            </a:r>
+          </a:p>
+          <a:p>
+            <a:pPr>
+              <a:spcAft>
+                <a:spcPts val="600"/>
+              </a:spcAft>
+              <a:defRPr sz="1800"/>
+            </a:pPr>
+            <a:r>
+              <a:t>'增资'关键词：1次 | '发行人基本情况'：0次 | 完全白跑</a:t>
+            </a:r>
+          </a:p>
+          <a:p>
+            <a:pPr>
+              <a:spcAft>
+                <a:spcPts val="600"/>
+              </a:spcAft>
+              <a:defRPr sz="1800"/>
+            </a:pPr>
+            <a:r>
+              <a:t>第二次上传：1-200页范围 → 封面+目录+发行人基本情况全有了</a:t>
+            </a:r>
+          </a:p>
+          <a:p>
+            <a:pPr>
+              <a:spcAft>
+                <a:spcPts val="600"/>
+              </a:spcAft>
+              <a:defRPr sz="1800"/>
+            </a:pPr>
+            <a:r>
+              <a:t>'增资'：4次 | '股权转让'：28次 | '持股比例'：4次</a:t>
+            </a:r>
+          </a:p>
+          <a:p>
+            <a:pPr>
+              <a:spcAft>
+                <a:spcPts val="600"/>
+              </a:spcAft>
+              <a:defRPr sz="1800"/>
+            </a:pPr>
+          </a:p>
+          <a:p>
+            <a:pPr>
+              <a:spcAft>
+                <a:spcPts val="600"/>
+              </a:spcAft>
+              <a:defRPr sz="1800"/>
+            </a:pPr>
+            <a:r>
+              <a:t>教训：先看PDF总页数，TOC定位找'发行人基本情况'页码，再设MinerU范围</a:t>
+            </a:r>
+          </a:p>
+          <a:p>
+            <a:pPr>
+              <a:spcAft>
+                <a:spcPts val="600"/>
+              </a:spcAft>
+              <a:defRPr sz="1800"/>
+            </a:pPr>
+            <a:r>
+              <a:t>不要随便填1-200，400页的PDF前200页和后200页内容完全不同</a:t>
             </a:r>
           </a:p>
         </p:txBody>
@@ -3563,7 +3602,451 @@
           <a:lstStyle/>
           <a:p>
             <a:pPr>
-              <a:defRPr sz="2800" b="1"/>
+              <a:defRPr sz="3000" b="1">
+                <a:solidFill>
+                  <a:srgbClr val="003366"/>
+                </a:solidFill>
+              </a:defRPr>
+            </a:pPr>
+            <a:r>
+              <a:t>踩坑2：表格被MinerU展平 → 数值全null</a:t>
+            </a:r>
+          </a:p>
+        </p:txBody>
+      </p:sp>
+      <p:sp>
+        <p:nvSpPr>
+          <p:cNvPr id="3" name="Content Placeholder 2"/>
+          <p:cNvSpPr>
+            <a:spLocks noGrp="1"/>
+          </p:cNvSpPr>
+          <p:nvPr>
+            <p:ph idx="1"/>
+          </p:nvPr>
+        </p:nvSpPr>
+        <p:spPr/>
+        <p:txBody>
+          <a:bodyPr/>
+          <a:lstStyle/>
+          <a:p/>
+          <a:p>
+            <a:pPr>
+              <a:spcAft>
+                <a:spcPts val="600"/>
+              </a:spcAft>
+              <a:defRPr sz="1800"/>
+            </a:pPr>
+            <a:r>
+              <a:t>赛分科技第59页：股权结构表格 → MinerU解析后只剩文字片段</a:t>
+            </a:r>
+          </a:p>
+          <a:p>
+            <a:pPr>
+              <a:spcAft>
+                <a:spcPts val="600"/>
+              </a:spcAft>
+              <a:defRPr sz="1800"/>
+            </a:pPr>
+            <a:r>
+              <a:t>'认购数量'关键词：0次 | '认购金额'：0次 | AI完全找不到数字</a:t>
+            </a:r>
+          </a:p>
+          <a:p>
+            <a:pPr>
+              <a:spcAft>
+                <a:spcPts val="600"/>
+              </a:spcAft>
+              <a:defRPr sz="1800"/>
+            </a:pPr>
+            <a:r>
+              <a:t>影石创新第64页：'股权结构如下：'后面表格完全丢失（50字符空页）</a:t>
+            </a:r>
+          </a:p>
+          <a:p>
+            <a:pPr>
+              <a:spcAft>
+                <a:spcPts val="600"/>
+              </a:spcAft>
+              <a:defRPr sz="1800"/>
+            </a:pPr>
+          </a:p>
+          <a:p>
+            <a:pPr>
+              <a:spcAft>
+                <a:spcPts val="600"/>
+              </a:spcAft>
+              <a:defRPr sz="1800"/>
+            </a:pPr>
+            <a:r>
+              <a:t>解法：人机协作</a:t>
+            </a:r>
+          </a:p>
+          <a:p>
+            <a:pPr>
+              <a:spcAft>
+                <a:spcPts val="600"/>
+              </a:spcAft>
+              <a:defRPr sz="1800"/>
+            </a:pPr>
+            <a:r>
+              <a:t>可自动 → 关键词密度评分 + TOC定位 + AI提取框架结构</a:t>
+            </a:r>
+          </a:p>
+          <a:p>
+            <a:pPr>
+              <a:spcAft>
+                <a:spcPts val="600"/>
+              </a:spcAft>
+              <a:defRPr sz="1800"/>
+            </a:pPr>
+            <a:r>
+              <a:t>需人工 → PDF表格拍照OCR/手动填入 → Markdown模板 → 秒转JSONL</a:t>
+            </a:r>
+          </a:p>
+          <a:p>
+            <a:pPr>
+              <a:spcAft>
+                <a:spcPts val="600"/>
+              </a:spcAft>
+              <a:defRPr sz="1800"/>
+            </a:pPr>
+            <a:r>
+              <a:t>最终：赛分184条存量、影石65条存量，全部有数值</a:t>
+            </a:r>
+          </a:p>
+        </p:txBody>
+      </p:sp>
+    </p:spTree>
+  </p:cSld>
+  <p:clrMapOvr>
+    <a:masterClrMapping/>
+  </p:clrMapOvr>
+</p:sld>
+</file>
+
+<file path=ppt/slides/slide5.xml><?xml version="1.0" encoding="utf-8"?>
+<p:sld xmlns:a="http://schemas.openxmlformats.org/drawingml/2006/main" xmlns:p="http://schemas.openxmlformats.org/presentationml/2006/main" xmlns:r="http://schemas.openxmlformats.org/officeDocument/2006/relationships">
+  <p:cSld>
+    <p:spTree>
+      <p:nvGrpSpPr>
+        <p:cNvPr id="1" name=""/>
+        <p:cNvGrpSpPr/>
+        <p:nvPr/>
+      </p:nvGrpSpPr>
+      <p:grpSpPr/>
+      <p:sp>
+        <p:nvSpPr>
+          <p:cNvPr id="2" name="Title 1"/>
+          <p:cNvSpPr>
+            <a:spLocks noGrp="1"/>
+          </p:cNvSpPr>
+          <p:nvPr>
+            <p:ph type="title"/>
+          </p:nvPr>
+        </p:nvSpPr>
+        <p:spPr/>
+        <p:txBody>
+          <a:bodyPr/>
+          <a:lstStyle/>
+          <a:p>
+            <a:pPr>
+              <a:defRPr sz="3000" b="1">
+                <a:solidFill>
+                  <a:srgbClr val="003366"/>
+                </a:solidFill>
+              </a:defRPr>
+            </a:pPr>
+            <a:r>
+              <a:t>踩坑3：AI输出JSON截断 + 重复数据</a:t>
+            </a:r>
+          </a:p>
+        </p:txBody>
+      </p:sp>
+      <p:sp>
+        <p:nvSpPr>
+          <p:cNvPr id="3" name="Content Placeholder 2"/>
+          <p:cNvSpPr>
+            <a:spLocks noGrp="1"/>
+          </p:cNvSpPr>
+          <p:nvPr>
+            <p:ph idx="1"/>
+          </p:nvPr>
+        </p:nvSpPr>
+        <p:spPr/>
+        <p:txBody>
+          <a:bodyPr/>
+          <a:lstStyle/>
+          <a:p/>
+          <a:p>
+            <a:pPr>
+              <a:spcAft>
+                <a:spcPts val="600"/>
+              </a:spcAft>
+              <a:defRPr sz="1800"/>
+            </a:pPr>
+            <a:r>
+              <a:t>赛分科技存量数据太大，单次API输出超24K tokens → JSON被截断</a:t>
+            </a:r>
+          </a:p>
+          <a:p>
+            <a:pPr>
+              <a:spcAft>
+                <a:spcPts val="600"/>
+              </a:spcAft>
+              <a:defRPr sz="1800"/>
+            </a:pPr>
+            <a:r>
+              <a:t>认缴记录同一条重复15次（15条全是'国寿疌泉'）</a:t>
+            </a:r>
+          </a:p>
+          <a:p>
+            <a:pPr>
+              <a:spcAft>
+                <a:spcPts val="600"/>
+              </a:spcAft>
+              <a:defRPr sz="1800"/>
+            </a:pPr>
+          </a:p>
+          <a:p>
+            <a:pPr>
+              <a:spcAft>
+                <a:spcPts val="600"/>
+              </a:spcAft>
+              <a:defRPr sz="1800"/>
+            </a:pPr>
+            <a:r>
+              <a:t>解法：</a:t>
+            </a:r>
+          </a:p>
+          <a:p>
+            <a:pPr>
+              <a:spcAft>
+                <a:spcPts val="600"/>
+              </a:spcAft>
+              <a:defRPr sz="1800"/>
+            </a:pPr>
+            <a:r>
+              <a:t>分轮调用：认缴流量和股权存量分开两次API请求，各走各的token预算</a:t>
+            </a:r>
+          </a:p>
+          <a:p>
+            <a:pPr>
+              <a:spcAft>
+                <a:spcPts val="600"/>
+              </a:spcAft>
+              <a:defRPr sz="1800"/>
+            </a:pPr>
+            <a:r>
+              <a:t>去重：同一认购方+同一日期 → 只保留一条</a:t>
+            </a:r>
+          </a:p>
+          <a:p>
+            <a:pPr>
+              <a:spcAft>
+                <a:spcPts val="600"/>
+              </a:spcAft>
+              <a:defRPr sz="1800"/>
+            </a:pPr>
+            <a:r>
+              <a:t>修复后：赛分15认缴+184存量，零null、零重复</a:t>
+            </a:r>
+          </a:p>
+        </p:txBody>
+      </p:sp>
+    </p:spTree>
+  </p:cSld>
+  <p:clrMapOvr>
+    <a:masterClrMapping/>
+  </p:clrMapOvr>
+</p:sld>
+</file>
+
+<file path=ppt/slides/slide6.xml><?xml version="1.0" encoding="utf-8"?>
+<p:sld xmlns:a="http://schemas.openxmlformats.org/drawingml/2006/main" xmlns:p="http://schemas.openxmlformats.org/presentationml/2006/main" xmlns:r="http://schemas.openxmlformats.org/officeDocument/2006/relationships">
+  <p:cSld>
+    <p:spTree>
+      <p:nvGrpSpPr>
+        <p:cNvPr id="1" name=""/>
+        <p:cNvGrpSpPr/>
+        <p:nvPr/>
+      </p:nvGrpSpPr>
+      <p:grpSpPr/>
+      <p:sp>
+        <p:nvSpPr>
+          <p:cNvPr id="2" name="Title 1"/>
+          <p:cNvSpPr>
+            <a:spLocks noGrp="1"/>
+          </p:cNvSpPr>
+          <p:nvPr>
+            <p:ph type="title"/>
+          </p:nvPr>
+        </p:nvSpPr>
+        <p:spPr/>
+        <p:txBody>
+          <a:bodyPr/>
+          <a:lstStyle/>
+          <a:p>
+            <a:pPr>
+              <a:defRPr sz="3000" b="1">
+                <a:solidFill>
+                  <a:srgbClr val="003366"/>
+                </a:solidFill>
+              </a:defRPr>
+            </a:pPr>
+            <a:r>
+              <a:t>核心创新：目录定位法（TOC-based Extraction）</a:t>
+            </a:r>
+          </a:p>
+        </p:txBody>
+      </p:sp>
+      <p:sp>
+        <p:nvSpPr>
+          <p:cNvPr id="3" name="Content Placeholder 2"/>
+          <p:cNvSpPr>
+            <a:spLocks noGrp="1"/>
+          </p:cNvSpPr>
+          <p:nvPr>
+            <p:ph idx="1"/>
+          </p:nvPr>
+        </p:nvSpPr>
+        <p:spPr/>
+        <p:txBody>
+          <a:bodyPr/>
+          <a:lstStyle/>
+          <a:p/>
+          <a:p>
+            <a:pPr>
+              <a:spcAft>
+                <a:spcPts val="600"/>
+              </a:spcAft>
+              <a:defRPr sz="1800"/>
+            </a:pPr>
+            <a:r>
+              <a:t>1. 先扫描MinerU JSON前30页，找到目录页（通常第10页）</a:t>
+            </a:r>
+          </a:p>
+          <a:p>
+            <a:pPr>
+              <a:spcAft>
+                <a:spcPts val="600"/>
+              </a:spcAft>
+              <a:defRPr sz="1800"/>
+            </a:pPr>
+            <a:r>
+              <a:t>2. 正则提取：'第四节 发行人基本情况 ........... 30'</a:t>
+            </a:r>
+          </a:p>
+          <a:p>
+            <a:pPr>
+              <a:spcAft>
+                <a:spcPts val="600"/>
+              </a:spcAft>
+              <a:defRPr sz="1800"/>
+            </a:pPr>
+            <a:r>
+              <a:t>3. 找到下一节起始页作为边界（如'第五节 业务和技术 ........... 87'）</a:t>
+            </a:r>
+          </a:p>
+          <a:p>
+            <a:pPr>
+              <a:spcAft>
+                <a:spcPts val="600"/>
+              </a:spcAft>
+              <a:defRPr sz="1800"/>
+            </a:pPr>
+            <a:r>
+              <a:t>4. 只提取第30-87页的文本</a:t>
+            </a:r>
+          </a:p>
+          <a:p>
+            <a:pPr>
+              <a:spcAft>
+                <a:spcPts val="600"/>
+              </a:spcAft>
+              <a:defRPr sz="1800"/>
+            </a:pPr>
+          </a:p>
+          <a:p>
+            <a:pPr>
+              <a:spcAft>
+                <a:spcPts val="600"/>
+              </a:spcAft>
+              <a:defRPr sz="1800"/>
+            </a:pPr>
+            <a:r>
+              <a:t>效果：</a:t>
+            </a:r>
+          </a:p>
+          <a:p>
+            <a:pPr>
+              <a:spcAft>
+                <a:spcPts val="600"/>
+              </a:spcAft>
+              <a:defRPr sz="1800"/>
+            </a:pPr>
+            <a:r>
+              <a:t>三协电机：存量 1条→37条（原来提取的是错误页面的内容）</a:t>
+            </a:r>
+          </a:p>
+          <a:p>
+            <a:pPr>
+              <a:spcAft>
+                <a:spcPts val="600"/>
+              </a:spcAft>
+              <a:defRPr sz="1800"/>
+            </a:pPr>
+            <a:r>
+              <a:t>三联锻造：精准定位33-37页增资/减资/股权转让段落</a:t>
+            </a:r>
+          </a:p>
+          <a:p>
+            <a:pPr>
+              <a:spcAft>
+                <a:spcPts val="600"/>
+              </a:spcAft>
+              <a:defRPr sz="1800"/>
+            </a:pPr>
+            <a:r>
+              <a:t>这个方法可以复用到任何招股书，不依赖人工经验</a:t>
+            </a:r>
+          </a:p>
+        </p:txBody>
+      </p:sp>
+    </p:spTree>
+  </p:cSld>
+  <p:clrMapOvr>
+    <a:masterClrMapping/>
+  </p:clrMapOvr>
+</p:sld>
+</file>
+
+<file path=ppt/slides/slide7.xml><?xml version="1.0" encoding="utf-8"?>
+<p:sld xmlns:a="http://schemas.openxmlformats.org/drawingml/2006/main" xmlns:p="http://schemas.openxmlformats.org/presentationml/2006/main" xmlns:r="http://schemas.openxmlformats.org/officeDocument/2006/relationships">
+  <p:cSld>
+    <p:spTree>
+      <p:nvGrpSpPr>
+        <p:cNvPr id="1" name=""/>
+        <p:cNvGrpSpPr/>
+        <p:nvPr/>
+      </p:nvGrpSpPr>
+      <p:grpSpPr/>
+      <p:sp>
+        <p:nvSpPr>
+          <p:cNvPr id="2" name="Title 1"/>
+          <p:cNvSpPr>
+            <a:spLocks noGrp="1"/>
+          </p:cNvSpPr>
+          <p:nvPr>
+            <p:ph type="title"/>
+          </p:nvPr>
+        </p:nvSpPr>
+        <p:spPr/>
+        <p:txBody>
+          <a:bodyPr/>
+          <a:lstStyle/>
+          <a:p>
+            <a:pPr>
+              <a:defRPr sz="2600" b="1"/>
             </a:pPr>
             <a:r>
               <a:t>最终成果：8家公司全部完成</a:t>
@@ -3598,7 +4081,7 @@
         </p:nvGraphicFramePr>
         <p:xfrm>
           <a:off x="914400" y="1371600"/>
-          <a:ext cx="10058400" cy="4114800"/>
+          <a:ext cx="10058400" cy="3703320"/>
         </p:xfrm>
         <a:graphic>
           <a:graphicData uri="http://schemas.openxmlformats.org/drawingml/2006/table">
@@ -3614,14 +4097,14 @@
                 <a:gridCol w="1676400"/>
                 <a:gridCol w="1676400"/>
               </a:tblGrid>
-              <a:tr h="457200">
+              <a:tr h="411480">
                 <a:tc>
                   <a:txBody>
                     <a:bodyPr/>
                     <a:lstStyle/>
                     <a:p>
                       <a:pPr>
-                        <a:defRPr sz="1400" b="1"/>
+                        <a:defRPr sz="1300" b="1"/>
                       </a:pPr>
                       <a:r>
                         <a:t>公司</a:t>
@@ -3636,7 +4119,7 @@
                     <a:lstStyle/>
                     <a:p>
                       <a:pPr>
-                        <a:defRPr sz="1400" b="1"/>
+                        <a:defRPr sz="1300" b="1"/>
                       </a:pPr>
                       <a:r>
                         <a:t>认缴</a:t>
@@ -3651,7 +4134,7 @@
                     <a:lstStyle/>
                     <a:p>
                       <a:pPr>
-                        <a:defRPr sz="1400" b="1"/>
+                        <a:defRPr sz="1300" b="1"/>
                       </a:pPr>
                       <a:r>
                         <a:t>存量</a:t>
@@ -3666,7 +4149,7 @@
                     <a:lstStyle/>
                     <a:p>
                       <a:pPr>
-                        <a:defRPr sz="1400" b="1"/>
+                        <a:defRPr sz="1300" b="1"/>
                       </a:pPr>
                       <a:r>
                         <a:t>转让</a:t>
@@ -3681,10 +4164,10 @@
                     <a:lstStyle/>
                     <a:p>
                       <a:pPr>
-                        <a:defRPr sz="1400" b="1"/>
+                        <a:defRPr sz="1300" b="1"/>
                       </a:pPr>
                       <a:r>
-                        <a:t>null值</a:t>
+                        <a:t>null</a:t>
                       </a:r>
                     </a:p>
                   </a:txBody>
@@ -3696,7 +4179,7 @@
                     <a:lstStyle/>
                     <a:p>
                       <a:pPr>
-                        <a:defRPr sz="1400" b="1"/>
+                        <a:defRPr sz="1300" b="1"/>
                       </a:pPr>
                       <a:r>
                         <a:t>亮点</a:t>
@@ -3706,14 +4189,14 @@
                   <a:tcPr/>
                 </a:tc>
               </a:tr>
-              <a:tr h="457200">
+              <a:tr h="411480">
                 <a:tc>
                   <a:txBody>
                     <a:bodyPr/>
                     <a:lstStyle/>
                     <a:p>
                       <a:pPr>
-                        <a:defRPr sz="1300"/>
+                        <a:defRPr sz="1200"/>
                       </a:pPr>
                       <a:r>
                         <a:t>友升股份</a:t>
@@ -3728,7 +4211,7 @@
                     <a:lstStyle/>
                     <a:p>
                       <a:pPr>
-                        <a:defRPr sz="1300"/>
+                        <a:defRPr sz="1200"/>
                       </a:pPr>
                       <a:r>
                         <a:t>13</a:t>
@@ -3743,10 +4226,10 @@
                     <a:lstStyle/>
                     <a:p>
                       <a:pPr>
-                        <a:defRPr sz="1300"/>
+                        <a:defRPr sz="1200"/>
                       </a:pPr>
                       <a:r>
-                        <a:t>32</a:t>
+                        <a:t>28</a:t>
                       </a:r>
                     </a:p>
                   </a:txBody>
@@ -3758,7 +4241,7 @@
                     <a:lstStyle/>
                     <a:p>
                       <a:pPr>
-                        <a:defRPr sz="1300"/>
+                        <a:defRPr sz="1200"/>
                       </a:pPr>
                       <a:r>
                         <a:t>5</a:t>
@@ -3773,7 +4256,7 @@
                     <a:lstStyle/>
                     <a:p>
                       <a:pPr>
-                        <a:defRPr sz="1300"/>
+                        <a:defRPr sz="1200"/>
                       </a:pPr>
                       <a:r>
                         <a:t>0</a:t>
@@ -3788,24 +4271,24 @@
                     <a:lstStyle/>
                     <a:p>
                       <a:pPr>
-                        <a:defRPr sz="1300"/>
+                        <a:defRPr sz="1200"/>
                       </a:pPr>
                       <a:r>
-                        <a:t>与教师示范2020年3/3完全匹配</a:t>
+                        <a:t>教师gold，2020年3笔完全匹配</a:t>
                       </a:r>
                     </a:p>
                   </a:txBody>
                   <a:tcPr/>
                 </a:tc>
               </a:tr>
-              <a:tr h="457200">
+              <a:tr h="411480">
                 <a:tc>
                   <a:txBody>
                     <a:bodyPr/>
                     <a:lstStyle/>
                     <a:p>
                       <a:pPr>
-                        <a:defRPr sz="1300"/>
+                        <a:defRPr sz="1200"/>
                       </a:pPr>
                       <a:r>
                         <a:t>云汉芯城</a:t>
@@ -3820,7 +4303,7 @@
                     <a:lstStyle/>
                     <a:p>
                       <a:pPr>
-                        <a:defRPr sz="1300"/>
+                        <a:defRPr sz="1200"/>
                       </a:pPr>
                       <a:r>
                         <a:t>15</a:t>
@@ -3835,7 +4318,7 @@
                     <a:lstStyle/>
                     <a:p>
                       <a:pPr>
-                        <a:defRPr sz="1300"/>
+                        <a:defRPr sz="1200"/>
                       </a:pPr>
                       <a:r>
                         <a:t>87</a:t>
@@ -3850,7 +4333,7 @@
                     <a:lstStyle/>
                     <a:p>
                       <a:pPr>
-                        <a:defRPr sz="1300"/>
+                        <a:defRPr sz="1200"/>
                       </a:pPr>
                       <a:r>
                         <a:t>8</a:t>
@@ -3865,7 +4348,7 @@
                     <a:lstStyle/>
                     <a:p>
                       <a:pPr>
-                        <a:defRPr sz="1300"/>
+                        <a:defRPr sz="1200"/>
                       </a:pPr>
                       <a:r>
                         <a:t>0</a:t>
@@ -3880,7 +4363,7 @@
                     <a:lstStyle/>
                     <a:p>
                       <a:pPr>
-                        <a:defRPr sz="1300"/>
+                        <a:defRPr sz="1200"/>
                       </a:pPr>
                       <a:r>
                         <a:t>数据最完整</a:t>
@@ -3890,14 +4373,106 @@
                   <a:tcPr/>
                 </a:tc>
               </a:tr>
-              <a:tr h="457200">
+              <a:tr h="411480">
                 <a:tc>
                   <a:txBody>
                     <a:bodyPr/>
                     <a:lstStyle/>
                     <a:p>
                       <a:pPr>
-                        <a:defRPr sz="1300"/>
+                        <a:defRPr sz="1200"/>
+                      </a:pPr>
+                      <a:r>
+                        <a:t>赛分科技</a:t>
+                      </a:r>
+                    </a:p>
+                  </a:txBody>
+                  <a:tcPr/>
+                </a:tc>
+                <a:tc>
+                  <a:txBody>
+                    <a:bodyPr/>
+                    <a:lstStyle/>
+                    <a:p>
+                      <a:pPr>
+                        <a:defRPr sz="1200"/>
+                      </a:pPr>
+                      <a:r>
+                        <a:t>15</a:t>
+                      </a:r>
+                    </a:p>
+                  </a:txBody>
+                  <a:tcPr/>
+                </a:tc>
+                <a:tc>
+                  <a:txBody>
+                    <a:bodyPr/>
+                    <a:lstStyle/>
+                    <a:p>
+                      <a:pPr>
+                        <a:defRPr sz="1200"/>
+                      </a:pPr>
+                      <a:r>
+                        <a:t>184</a:t>
+                      </a:r>
+                    </a:p>
+                  </a:txBody>
+                  <a:tcPr/>
+                </a:tc>
+                <a:tc>
+                  <a:txBody>
+                    <a:bodyPr/>
+                    <a:lstStyle/>
+                    <a:p>
+                      <a:pPr>
+                        <a:defRPr sz="1200"/>
+                      </a:pPr>
+                      <a:r>
+                        <a:t>2</a:t>
+                      </a:r>
+                    </a:p>
+                  </a:txBody>
+                  <a:tcPr/>
+                </a:tc>
+                <a:tc>
+                  <a:txBody>
+                    <a:bodyPr/>
+                    <a:lstStyle/>
+                    <a:p>
+                      <a:pPr>
+                        <a:defRPr sz="1200"/>
+                      </a:pPr>
+                      <a:r>
+                        <a:t>0</a:t>
+                      </a:r>
+                    </a:p>
+                  </a:txBody>
+                  <a:tcPr/>
+                </a:tc>
+                <a:tc>
+                  <a:txBody>
+                    <a:bodyPr/>
+                    <a:lstStyle/>
+                    <a:p>
+                      <a:pPr>
+                        <a:defRPr sz="1200"/>
+                      </a:pPr>
+                      <a:r>
+                        <a:t>存量14→184，55页+59页手动填入</a:t>
+                      </a:r>
+                    </a:p>
+                  </a:txBody>
+                  <a:tcPr/>
+                </a:tc>
+              </a:tr>
+              <a:tr h="411480">
+                <a:tc>
+                  <a:txBody>
+                    <a:bodyPr/>
+                    <a:lstStyle/>
+                    <a:p>
+                      <a:pPr>
+                        <a:defRPr sz="1200"/>
                       </a:pPr>
                       <a:r>
                         <a:t>影石创新</a:t>
@@ -3912,7 +4487,7 @@
                     <a:lstStyle/>
                     <a:p>
                       <a:pPr>
-                        <a:defRPr sz="1300"/>
+                        <a:defRPr sz="1200"/>
                       </a:pPr>
                       <a:r>
                         <a:t>2</a:t>
@@ -3927,10 +4502,10 @@
                     <a:lstStyle/>
                     <a:p>
                       <a:pPr>
-                        <a:defRPr sz="1300"/>
+                        <a:defRPr sz="1200"/>
                       </a:pPr>
                       <a:r>
-                        <a:t>40</a:t>
+                        <a:t>65</a:t>
                       </a:r>
                     </a:p>
                   </a:txBody>
@@ -3942,7 +4517,7 @@
                     <a:lstStyle/>
                     <a:p>
                       <a:pPr>
-                        <a:defRPr sz="1300"/>
+                        <a:defRPr sz="1200"/>
                       </a:pPr>
                       <a:r>
                         <a:t>1</a:t>
@@ -3957,7 +4532,238 @@
                     <a:lstStyle/>
                     <a:p>
                       <a:pPr>
-                        <a:defRPr sz="1300"/>
+                        <a:defRPr sz="1200"/>
+                      </a:pPr>
+                      <a:r>
+                        <a:t>0</a:t>
+                      </a:r>
+                    </a:p>
+                  </a:txBody>
+                  <a:tcPr/>
+                </a:tc>
+                <a:tc>
+                  <a:txBody>
+                    <a:bodyPr/>
+                    <a:lstStyle/>
+                    <a:p>
+                      <a:pPr>
+                        <a:defRPr sz="1200"/>
+                      </a:pPr>
+                      <a:r>
+                        <a:t>存量2→65，64+99页手动填入</a:t>
+                      </a:r>
+                    </a:p>
+                  </a:txBody>
+                  <a:tcPr/>
+                </a:tc>
+              </a:tr>
+              <a:tr h="411480">
+                <a:tc>
+                  <a:txBody>
+                    <a:bodyPr/>
+                    <a:lstStyle/>
+                    <a:p>
+                      <a:pPr>
+                        <a:defRPr sz="1200"/>
+                      </a:pPr>
+                      <a:r>
+                        <a:t>三协电机</a:t>
+                      </a:r>
+                    </a:p>
+                  </a:txBody>
+                  <a:tcPr/>
+                </a:tc>
+                <a:tc>
+                  <a:txBody>
+                    <a:bodyPr/>
+                    <a:lstStyle/>
+                    <a:p>
+                      <a:pPr>
+                        <a:defRPr sz="1200"/>
+                      </a:pPr>
+                      <a:r>
+                        <a:t>3</a:t>
+                      </a:r>
+                    </a:p>
+                  </a:txBody>
+                  <a:tcPr/>
+                </a:tc>
+                <a:tc>
+                  <a:txBody>
+                    <a:bodyPr/>
+                    <a:lstStyle/>
+                    <a:p>
+                      <a:pPr>
+                        <a:defRPr sz="1200"/>
+                      </a:pPr>
+                      <a:r>
+                        <a:t>37</a:t>
+                      </a:r>
+                    </a:p>
+                  </a:txBody>
+                  <a:tcPr/>
+                </a:tc>
+                <a:tc>
+                  <a:txBody>
+                    <a:bodyPr/>
+                    <a:lstStyle/>
+                    <a:p>
+                      <a:pPr>
+                        <a:defRPr sz="1200"/>
+                      </a:pPr>
+                      <a:r>
+                        <a:t>10</a:t>
+                      </a:r>
+                    </a:p>
+                  </a:txBody>
+                  <a:tcPr/>
+                </a:tc>
+                <a:tc>
+                  <a:txBody>
+                    <a:bodyPr/>
+                    <a:lstStyle/>
+                    <a:p>
+                      <a:pPr>
+                        <a:defRPr sz="1200"/>
+                      </a:pPr>
+                      <a:r>
+                        <a:t>0</a:t>
+                      </a:r>
+                    </a:p>
+                  </a:txBody>
+                  <a:tcPr/>
+                </a:tc>
+                <a:tc>
+                  <a:txBody>
+                    <a:bodyPr/>
+                    <a:lstStyle/>
+                    <a:p>
+                      <a:pPr>
+                        <a:defRPr sz="1200"/>
+                      </a:pPr>
+                      <a:r>
+                        <a:t>TOC定位，存量1→37</a:t>
+                      </a:r>
+                    </a:p>
+                  </a:txBody>
+                  <a:tcPr/>
+                </a:tc>
+              </a:tr>
+              <a:tr h="411480">
+                <a:tc>
+                  <a:txBody>
+                    <a:bodyPr/>
+                    <a:lstStyle/>
+                    <a:p>
+                      <a:pPr>
+                        <a:defRPr sz="1200"/>
+                      </a:pPr>
+                      <a:r>
+                        <a:t>黄山谷捷</a:t>
+                      </a:r>
+                    </a:p>
+                  </a:txBody>
+                  <a:tcPr/>
+                </a:tc>
+                <a:tc>
+                  <a:txBody>
+                    <a:bodyPr/>
+                    <a:lstStyle/>
+                    <a:p>
+                      <a:pPr>
+                        <a:defRPr sz="1200"/>
+                      </a:pPr>
+                      <a:r>
+                        <a:t>3</a:t>
+                      </a:r>
+                    </a:p>
+                  </a:txBody>
+                  <a:tcPr/>
+                </a:tc>
+                <a:tc>
+                  <a:txBody>
+                    <a:bodyPr/>
+                    <a:lstStyle/>
+                    <a:p>
+                      <a:pPr>
+                        <a:defRPr sz="1200"/>
+                      </a:pPr>
+                      <a:r>
+                        <a:t>24</a:t>
+                      </a:r>
+                    </a:p>
+                  </a:txBody>
+                  <a:tcPr/>
+                </a:tc>
+                <a:tc>
+                  <a:txBody>
+                    <a:bodyPr/>
+                    <a:lstStyle/>
+                    <a:p>
+                      <a:pPr>
+                        <a:defRPr sz="1200"/>
+                      </a:pPr>
+                      <a:r>
+                        <a:t>3</a:t>
+                      </a:r>
+                    </a:p>
+                  </a:txBody>
+                  <a:tcPr/>
+                </a:tc>
+                <a:tc>
+                  <a:txBody>
+                    <a:bodyPr/>
+                    <a:lstStyle/>
+                    <a:p>
+                      <a:pPr>
+                        <a:defRPr sz="1200"/>
+                      </a:pPr>
+                      <a:r>
+                        <a:t>0</a:t>
+                      </a:r>
+                    </a:p>
+                  </a:txBody>
+                  <a:tcPr/>
+                </a:tc>
+                <a:tc>
+                  <a:txBody>
+                    <a:bodyPr/>
+                    <a:lstStyle/>
+                    <a:p>
+                      <a:pPr>
+                        <a:defRPr sz="1200"/>
+                      </a:pPr>
+                      <a:r>
+                        <a:t>确认出资额=认购数量</a:t>
+                      </a:r>
+                    </a:p>
+                  </a:txBody>
+                  <a:tcPr/>
+                </a:tc>
+              </a:tr>
+              <a:tr h="411480">
+                <a:tc>
+                  <a:txBody>
+                    <a:bodyPr/>
+                    <a:lstStyle/>
+                    <a:p>
+                      <a:pPr>
+                        <a:defRPr sz="1200"/>
+                      </a:pPr>
+                      <a:r>
+                        <a:t>三联锻造</a:t>
+                      </a:r>
+                    </a:p>
+                  </a:txBody>
+                  <a:tcPr/>
+                </a:tc>
+                <a:tc>
+                  <a:txBody>
+                    <a:bodyPr/>
+                    <a:lstStyle/>
+                    <a:p>
+                      <a:pPr>
+                        <a:defRPr sz="1200"/>
                       </a:pPr>
                       <a:r>
                         <a:t>1</a:t>
@@ -3972,69 +4778,7 @@
                     <a:lstStyle/>
                     <a:p>
                       <a:pPr>
-                        <a:defRPr sz="1300"/>
-                      </a:pPr>
-                      <a:r>
-                        <a:t>存量 2→40（关键词密度评分修复）</a:t>
-                      </a:r>
-                    </a:p>
-                  </a:txBody>
-                  <a:tcPr/>
-                </a:tc>
-              </a:tr>
-              <a:tr h="457200">
-                <a:tc>
-                  <a:txBody>
-                    <a:bodyPr/>
-                    <a:lstStyle/>
-                    <a:p>
-                      <a:pPr>
-                        <a:defRPr sz="1300"/>
-                      </a:pPr>
-                      <a:r>
-                        <a:t>赛分科技</a:t>
-                      </a:r>
-                    </a:p>
-                  </a:txBody>
-                  <a:tcPr/>
-                </a:tc>
-                <a:tc>
-                  <a:txBody>
-                    <a:bodyPr/>
-                    <a:lstStyle/>
-                    <a:p>
-                      <a:pPr>
-                        <a:defRPr sz="1300"/>
-                      </a:pPr>
-                      <a:r>
-                        <a:t>15</a:t>
-                      </a:r>
-                    </a:p>
-                  </a:txBody>
-                  <a:tcPr/>
-                </a:tc>
-                <a:tc>
-                  <a:txBody>
-                    <a:bodyPr/>
-                    <a:lstStyle/>
-                    <a:p>
-                      <a:pPr>
-                        <a:defRPr sz="1300"/>
-                      </a:pPr>
-                      <a:r>
-                        <a:t>153</a:t>
-                      </a:r>
-                    </a:p>
-                  </a:txBody>
-                  <a:tcPr/>
-                </a:tc>
-                <a:tc>
-                  <a:txBody>
-                    <a:bodyPr/>
-                    <a:lstStyle/>
-                    <a:p>
-                      <a:pPr>
-                        <a:defRPr sz="1300"/>
+                        <a:defRPr sz="1200"/>
                       </a:pPr>
                       <a:r>
                         <a:t>2</a:t>
@@ -4049,54 +4793,7 @@
                     <a:lstStyle/>
                     <a:p>
                       <a:pPr>
-                        <a:defRPr sz="1300"/>
-                      </a:pPr>
-                      <a:r>
-                        <a:t>14</a:t>
-                      </a:r>
-                    </a:p>
-                  </a:txBody>
-                  <a:tcPr/>
-                </a:tc>
-                <a:tc>
-                  <a:txBody>
-                    <a:bodyPr/>
-                    <a:lstStyle/>
-                    <a:p>
-                      <a:pPr>
-                        <a:defRPr sz="1300"/>
-                      </a:pPr>
-                      <a:r>
-                        <a:t>存量 14→153（分轮调用修复）</a:t>
-                      </a:r>
-                    </a:p>
-                  </a:txBody>
-                  <a:tcPr/>
-                </a:tc>
-              </a:tr>
-              <a:tr h="457200">
-                <a:tc>
-                  <a:txBody>
-                    <a:bodyPr/>
-                    <a:lstStyle/>
-                    <a:p>
-                      <a:pPr>
-                        <a:defRPr sz="1300"/>
-                      </a:pPr>
-                      <a:r>
-                        <a:t>三协电机</a:t>
-                      </a:r>
-                    </a:p>
-                  </a:txBody>
-                  <a:tcPr/>
-                </a:tc>
-                <a:tc>
-                  <a:txBody>
-                    <a:bodyPr/>
-                    <a:lstStyle/>
-                    <a:p>
-                      <a:pPr>
-                        <a:defRPr sz="1300"/>
+                        <a:defRPr sz="1200"/>
                       </a:pPr>
                       <a:r>
                         <a:t>3</a:t>
@@ -4111,10 +4808,10 @@
                     <a:lstStyle/>
                     <a:p>
                       <a:pPr>
-                        <a:defRPr sz="1300"/>
+                        <a:defRPr sz="1200"/>
                       </a:pPr>
                       <a:r>
-                        <a:t>5</a:t>
+                        <a:t>0</a:t>
                       </a:r>
                     </a:p>
                   </a:txBody>
@@ -4126,10 +4823,27 @@
                     <a:lstStyle/>
                     <a:p>
                       <a:pPr>
-                        <a:defRPr sz="1300"/>
+                        <a:defRPr sz="1200"/>
                       </a:pPr>
                       <a:r>
-                        <a:t>10</a:t>
+                        <a:t>TOC定位33-37页</a:t>
+                      </a:r>
+                    </a:p>
+                  </a:txBody>
+                  <a:tcPr/>
+                </a:tc>
+              </a:tr>
+              <a:tr h="411480">
+                <a:tc>
+                  <a:txBody>
+                    <a:bodyPr/>
+                    <a:lstStyle/>
+                    <a:p>
+                      <a:pPr>
+                        <a:defRPr sz="1200"/>
+                      </a:pPr>
+                      <a:r>
+                        <a:t>星图测控</a:t>
                       </a:r>
                     </a:p>
                   </a:txBody>
@@ -4141,7 +4855,37 @@
                     <a:lstStyle/>
                     <a:p>
                       <a:pPr>
-                        <a:defRPr sz="1300"/>
+                        <a:defRPr sz="1200"/>
+                      </a:pPr>
+                      <a:r>
+                        <a:t>3</a:t>
+                      </a:r>
+                    </a:p>
+                  </a:txBody>
+                  <a:tcPr/>
+                </a:tc>
+                <a:tc>
+                  <a:txBody>
+                    <a:bodyPr/>
+                    <a:lstStyle/>
+                    <a:p>
+                      <a:pPr>
+                        <a:defRPr sz="1200"/>
+                      </a:pPr>
+                      <a:r>
+                        <a:t>11</a:t>
+                      </a:r>
+                    </a:p>
+                  </a:txBody>
+                  <a:tcPr/>
+                </a:tc>
+                <a:tc>
+                  <a:txBody>
+                    <a:bodyPr/>
+                    <a:lstStyle/>
+                    <a:p>
+                      <a:pPr>
+                        <a:defRPr sz="1200"/>
                       </a:pPr>
                       <a:r>
                         <a:t>2</a:t>
@@ -4156,84 +4900,7 @@
                     <a:lstStyle/>
                     <a:p>
                       <a:pPr>
-                        <a:defRPr sz="1300"/>
-                      </a:pPr>
-                      <a:r>
-                        <a:t>MinerU 页码范围调整后有数值</a:t>
-                      </a:r>
-                    </a:p>
-                  </a:txBody>
-                  <a:tcPr/>
-                </a:tc>
-              </a:tr>
-              <a:tr h="457200">
-                <a:tc>
-                  <a:txBody>
-                    <a:bodyPr/>
-                    <a:lstStyle/>
-                    <a:p>
-                      <a:pPr>
-                        <a:defRPr sz="1300"/>
-                      </a:pPr>
-                      <a:r>
-                        <a:t>黄山谷捷</a:t>
-                      </a:r>
-                    </a:p>
-                  </a:txBody>
-                  <a:tcPr/>
-                </a:tc>
-                <a:tc>
-                  <a:txBody>
-                    <a:bodyPr/>
-                    <a:lstStyle/>
-                    <a:p>
-                      <a:pPr>
-                        <a:defRPr sz="1300"/>
-                      </a:pPr>
-                      <a:r>
-                        <a:t>3</a:t>
-                      </a:r>
-                    </a:p>
-                  </a:txBody>
-                  <a:tcPr/>
-                </a:tc>
-                <a:tc>
-                  <a:txBody>
-                    <a:bodyPr/>
-                    <a:lstStyle/>
-                    <a:p>
-                      <a:pPr>
-                        <a:defRPr sz="1300"/>
-                      </a:pPr>
-                      <a:r>
-                        <a:t>24</a:t>
-                      </a:r>
-                    </a:p>
-                  </a:txBody>
-                  <a:tcPr/>
-                </a:tc>
-                <a:tc>
-                  <a:txBody>
-                    <a:bodyPr/>
-                    <a:lstStyle/>
-                    <a:p>
-                      <a:pPr>
-                        <a:defRPr sz="1300"/>
-                      </a:pPr>
-                      <a:r>
-                        <a:t>3</a:t>
-                      </a:r>
-                    </a:p>
-                  </a:txBody>
-                  <a:tcPr/>
-                </a:tc>
-                <a:tc>
-                  <a:txBody>
-                    <a:bodyPr/>
-                    <a:lstStyle/>
-                    <a:p>
-                      <a:pPr>
-                        <a:defRPr sz="1300"/>
+                        <a:defRPr sz="1200"/>
                       </a:pPr>
                       <a:r>
                         <a:t>0</a:t>
@@ -4248,194 +4915,10 @@
                     <a:lstStyle/>
                     <a:p>
                       <a:pPr>
-                        <a:defRPr sz="1300"/>
+                        <a:defRPr sz="1200"/>
                       </a:pPr>
                       <a:r>
-                        <a:t>数据完整</a:t>
-                      </a:r>
-                    </a:p>
-                  </a:txBody>
-                  <a:tcPr/>
-                </a:tc>
-              </a:tr>
-              <a:tr h="457200">
-                <a:tc>
-                  <a:txBody>
-                    <a:bodyPr/>
-                    <a:lstStyle/>
-                    <a:p>
-                      <a:pPr>
-                        <a:defRPr sz="1300"/>
-                      </a:pPr>
-                      <a:r>
-                        <a:t>星图测控</a:t>
-                      </a:r>
-                    </a:p>
-                  </a:txBody>
-                  <a:tcPr/>
-                </a:tc>
-                <a:tc>
-                  <a:txBody>
-                    <a:bodyPr/>
-                    <a:lstStyle/>
-                    <a:p>
-                      <a:pPr>
-                        <a:defRPr sz="1300"/>
-                      </a:pPr>
-                      <a:r>
-                        <a:t>3</a:t>
-                      </a:r>
-                    </a:p>
-                  </a:txBody>
-                  <a:tcPr/>
-                </a:tc>
-                <a:tc>
-                  <a:txBody>
-                    <a:bodyPr/>
-                    <a:lstStyle/>
-                    <a:p>
-                      <a:pPr>
-                        <a:defRPr sz="1300"/>
-                      </a:pPr>
-                      <a:r>
-                        <a:t>11</a:t>
-                      </a:r>
-                    </a:p>
-                  </a:txBody>
-                  <a:tcPr/>
-                </a:tc>
-                <a:tc>
-                  <a:txBody>
-                    <a:bodyPr/>
-                    <a:lstStyle/>
-                    <a:p>
-                      <a:pPr>
-                        <a:defRPr sz="1300"/>
-                      </a:pPr>
-                      <a:r>
-                        <a:t>2</a:t>
-                      </a:r>
-                    </a:p>
-                  </a:txBody>
-                  <a:tcPr/>
-                </a:tc>
-                <a:tc>
-                  <a:txBody>
-                    <a:bodyPr/>
-                    <a:lstStyle/>
-                    <a:p>
-                      <a:pPr>
-                        <a:defRPr sz="1300"/>
-                      </a:pPr>
-                      <a:r>
-                        <a:t>0</a:t>
-                      </a:r>
-                    </a:p>
-                  </a:txBody>
-                  <a:tcPr/>
-                </a:tc>
-                <a:tc>
-                  <a:txBody>
-                    <a:bodyPr/>
-                    <a:lstStyle/>
-                    <a:p>
-                      <a:pPr>
-                        <a:defRPr sz="1300"/>
-                      </a:pPr>
-                      <a:r>
-                        <a:t>北交所，正常完成</a:t>
-                      </a:r>
-                    </a:p>
-                  </a:txBody>
-                  <a:tcPr/>
-                </a:tc>
-              </a:tr>
-              <a:tr h="457200">
-                <a:tc>
-                  <a:txBody>
-                    <a:bodyPr/>
-                    <a:lstStyle/>
-                    <a:p>
-                      <a:pPr>
-                        <a:defRPr sz="1300"/>
-                      </a:pPr>
-                      <a:r>
-                        <a:t>三联锻造</a:t>
-                      </a:r>
-                    </a:p>
-                  </a:txBody>
-                  <a:tcPr/>
-                </a:tc>
-                <a:tc>
-                  <a:txBody>
-                    <a:bodyPr/>
-                    <a:lstStyle/>
-                    <a:p>
-                      <a:pPr>
-                        <a:defRPr sz="1300"/>
-                      </a:pPr>
-                      <a:r>
-                        <a:t>1</a:t>
-                      </a:r>
-                    </a:p>
-                  </a:txBody>
-                  <a:tcPr/>
-                </a:tc>
-                <a:tc>
-                  <a:txBody>
-                    <a:bodyPr/>
-                    <a:lstStyle/>
-                    <a:p>
-                      <a:pPr>
-                        <a:defRPr sz="1300"/>
-                      </a:pPr>
-                      <a:r>
-                        <a:t>14</a:t>
-                      </a:r>
-                    </a:p>
-                  </a:txBody>
-                  <a:tcPr/>
-                </a:tc>
-                <a:tc>
-                  <a:txBody>
-                    <a:bodyPr/>
-                    <a:lstStyle/>
-                    <a:p>
-                      <a:pPr>
-                        <a:defRPr sz="1300"/>
-                      </a:pPr>
-                      <a:r>
-                        <a:t>3</a:t>
-                      </a:r>
-                    </a:p>
-                  </a:txBody>
-                  <a:tcPr/>
-                </a:tc>
-                <a:tc>
-                  <a:txBody>
-                    <a:bodyPr/>
-                    <a:lstStyle/>
-                    <a:p>
-                      <a:pPr>
-                        <a:defRPr sz="1300"/>
-                      </a:pPr>
-                      <a:r>
-                        <a:t>0</a:t>
-                      </a:r>
-                    </a:p>
-                  </a:txBody>
-                  <a:tcPr/>
-                </a:tc>
-                <a:tc>
-                  <a:txBody>
-                    <a:bodyPr/>
-                    <a:lstStyle/>
-                    <a:p>
-                      <a:pPr>
-                        <a:defRPr sz="1300"/>
-                      </a:pPr>
-                      <a:r>
-                        <a:t>MinerU失败→换JSON→成功</a:t>
+                        <a:t>evidence提取修复</a:t>
                       </a:r>
                     </a:p>
                   </a:txBody>
@@ -4454,395 +4937,6 @@
 </p:sld>
 </file>
 
-<file path=ppt/slides/slide5.xml><?xml version="1.0" encoding="utf-8"?>
-<p:sld xmlns:a="http://schemas.openxmlformats.org/drawingml/2006/main" xmlns:p="http://schemas.openxmlformats.org/presentationml/2006/main" xmlns:r="http://schemas.openxmlformats.org/officeDocument/2006/relationships">
-  <p:cSld>
-    <p:spTree>
-      <p:nvGrpSpPr>
-        <p:cNvPr id="1" name=""/>
-        <p:cNvGrpSpPr/>
-        <p:nvPr/>
-      </p:nvGrpSpPr>
-      <p:grpSpPr/>
-      <p:sp>
-        <p:nvSpPr>
-          <p:cNvPr id="2" name="Title 1"/>
-          <p:cNvSpPr>
-            <a:spLocks noGrp="1"/>
-          </p:cNvSpPr>
-          <p:nvPr>
-            <p:ph type="title"/>
-          </p:nvPr>
-        </p:nvSpPr>
-        <p:spPr/>
-        <p:txBody>
-          <a:bodyPr/>
-          <a:lstStyle/>
-          <a:p>
-            <a:pPr>
-              <a:defRPr sz="3200" b="1">
-                <a:solidFill>
-                  <a:srgbClr val="003366"/>
-                </a:solidFill>
-              </a:defRPr>
-            </a:pPr>
-            <a:r>
-              <a:t>踩坑1：PDF解析失败 &amp; 文本截断</a:t>
-            </a:r>
-          </a:p>
-        </p:txBody>
-      </p:sp>
-      <p:sp>
-        <p:nvSpPr>
-          <p:cNvPr id="3" name="Content Placeholder 2"/>
-          <p:cNvSpPr>
-            <a:spLocks noGrp="1"/>
-          </p:cNvSpPr>
-          <p:nvPr>
-            <p:ph idx="1"/>
-          </p:nvPr>
-        </p:nvSpPr>
-        <p:spPr/>
-        <p:txBody>
-          <a:bodyPr/>
-          <a:lstStyle/>
-          <a:p/>
-          <a:p>
-            <a:pPr>
-              <a:spcAft>
-                <a:spcPts val="800"/>
-              </a:spcAft>
-              <a:defRPr sz="1800"/>
-            </a:pPr>
-            <a:r>
-              <a:t>三联锻造：MinerU 连续两次解析全失败 → 第三次调整页码范围后成功（增资 0→6次）</a:t>
-            </a:r>
-          </a:p>
-          <a:p>
-            <a:pPr>
-              <a:spcAft>
-                <a:spcPts val="800"/>
-              </a:spcAft>
-              <a:defRPr sz="1800"/>
-            </a:pPr>
-            <a:r>
-              <a:t>影石创新：全文75K字符，前35K截断丢失股权结构 → 关键词密度评分，存量 2→40</a:t>
-            </a:r>
-          </a:p>
-          <a:p>
-            <a:pPr>
-              <a:spcAft>
-                <a:spcPts val="800"/>
-              </a:spcAft>
-              <a:defRPr sz="1800"/>
-            </a:pPr>
-            <a:r>
-              <a:t>赛分科技：468页PDF，三份MinerU都没覆盖到增资章节 → 重新指定50-180页范围</a:t>
-            </a:r>
-          </a:p>
-          <a:p>
-            <a:pPr>
-              <a:spcAft>
-                <a:spcPts val="800"/>
-              </a:spcAft>
-              <a:defRPr sz="1800"/>
-            </a:pPr>
-          </a:p>
-          <a:p>
-            <a:pPr>
-              <a:spcAft>
-                <a:spcPts val="800"/>
-              </a:spcAft>
-              <a:defRPr sz="1800"/>
-            </a:pPr>
-            <a:r>
-              <a:t>教训：MinerU 页码范围决定了数据质量的上限，不能随便填</a:t>
-            </a:r>
-          </a:p>
-        </p:txBody>
-      </p:sp>
-    </p:spTree>
-  </p:cSld>
-  <p:clrMapOvr>
-    <a:masterClrMapping/>
-  </p:clrMapOvr>
-</p:sld>
-</file>
-
-<file path=ppt/slides/slide6.xml><?xml version="1.0" encoding="utf-8"?>
-<p:sld xmlns:a="http://schemas.openxmlformats.org/drawingml/2006/main" xmlns:p="http://schemas.openxmlformats.org/presentationml/2006/main" xmlns:r="http://schemas.openxmlformats.org/officeDocument/2006/relationships">
-  <p:cSld>
-    <p:spTree>
-      <p:nvGrpSpPr>
-        <p:cNvPr id="1" name=""/>
-        <p:cNvGrpSpPr/>
-        <p:nvPr/>
-      </p:nvGrpSpPr>
-      <p:grpSpPr/>
-      <p:sp>
-        <p:nvSpPr>
-          <p:cNvPr id="2" name="Title 1"/>
-          <p:cNvSpPr>
-            <a:spLocks noGrp="1"/>
-          </p:cNvSpPr>
-          <p:nvPr>
-            <p:ph type="title"/>
-          </p:nvPr>
-        </p:nvSpPr>
-        <p:spPr/>
-        <p:txBody>
-          <a:bodyPr/>
-          <a:lstStyle/>
-          <a:p>
-            <a:pPr>
-              <a:defRPr sz="3200" b="1">
-                <a:solidFill>
-                  <a:srgbClr val="003366"/>
-                </a:solidFill>
-              </a:defRPr>
-            </a:pPr>
-            <a:r>
-              <a:t>踩坑2：AI输出截断 &amp; 数据幻觉</a:t>
-            </a:r>
-          </a:p>
-        </p:txBody>
-      </p:sp>
-      <p:sp>
-        <p:nvSpPr>
-          <p:cNvPr id="3" name="Content Placeholder 2"/>
-          <p:cNvSpPr>
-            <a:spLocks noGrp="1"/>
-          </p:cNvSpPr>
-          <p:nvPr>
-            <p:ph idx="1"/>
-          </p:nvPr>
-        </p:nvSpPr>
-        <p:spPr/>
-        <p:txBody>
-          <a:bodyPr/>
-          <a:lstStyle/>
-          <a:p/>
-          <a:p>
-            <a:pPr>
-              <a:spcAft>
-                <a:spcPts val="800"/>
-              </a:spcAft>
-              <a:defRPr sz="1800"/>
-            </a:pPr>
-            <a:r>
-              <a:t>赛分科技：完整Prompt导致输出超24K tokens，JSON被截断 → 分轮调用（认缴/存量分开）</a:t>
-            </a:r>
-          </a:p>
-          <a:p>
-            <a:pPr>
-              <a:spcAft>
-                <a:spcPts val="800"/>
-              </a:spcAft>
-              <a:defRPr sz="1800"/>
-            </a:pPr>
-            <a:r>
-              <a:t>友升2022年：第一版10个认购方全为null → 合并双JSON+密度评分，null全部消除</a:t>
-            </a:r>
-          </a:p>
-          <a:p>
-            <a:pPr>
-              <a:spcAft>
-                <a:spcPts val="800"/>
-              </a:spcAft>
-              <a:defRPr sz="1800"/>
-            </a:pPr>
-            <a:r>
-              <a:t>幻觉压制：Temperature=0.1 + JSON Schema强约束 + "未披露就填null"指令</a:t>
-            </a:r>
-          </a:p>
-          <a:p>
-            <a:pPr>
-              <a:spcAft>
-                <a:spcPts val="800"/>
-              </a:spcAft>
-              <a:defRPr sz="1800"/>
-            </a:pPr>
-          </a:p>
-          <a:p>
-            <a:pPr>
-              <a:spcAft>
-                <a:spcPts val="800"/>
-              </a:spcAft>
-              <a:defRPr sz="1800" b="1"/>
-            </a:pPr>
-            <a:r>
-              <a:t>结论：AI能抽出框架结构，但表格中的数字容易被展平文本丢失</a:t>
-            </a:r>
-          </a:p>
-        </p:txBody>
-      </p:sp>
-    </p:spTree>
-  </p:cSld>
-  <p:clrMapOvr>
-    <a:masterClrMapping/>
-  </p:clrMapOvr>
-</p:sld>
-</file>
-
-<file path=ppt/slides/slide7.xml><?xml version="1.0" encoding="utf-8"?>
-<p:sld xmlns:a="http://schemas.openxmlformats.org/drawingml/2006/main" xmlns:p="http://schemas.openxmlformats.org/presentationml/2006/main" xmlns:r="http://schemas.openxmlformats.org/officeDocument/2006/relationships">
-  <p:cSld>
-    <p:spTree>
-      <p:nvGrpSpPr>
-        <p:cNvPr id="1" name=""/>
-        <p:cNvGrpSpPr/>
-        <p:nvPr/>
-      </p:nvGrpSpPr>
-      <p:grpSpPr/>
-      <p:sp>
-        <p:nvSpPr>
-          <p:cNvPr id="2" name="Title 1"/>
-          <p:cNvSpPr>
-            <a:spLocks noGrp="1"/>
-          </p:cNvSpPr>
-          <p:nvPr>
-            <p:ph type="title"/>
-          </p:nvPr>
-        </p:nvSpPr>
-        <p:spPr/>
-        <p:txBody>
-          <a:bodyPr/>
-          <a:lstStyle/>
-          <a:p>
-            <a:pPr>
-              <a:defRPr sz="3200" b="1">
-                <a:solidFill>
-                  <a:srgbClr val="003366"/>
-                </a:solidFill>
-              </a:defRPr>
-            </a:pPr>
-            <a:r>
-              <a:t>踩坑3：没有主动核验 → 被老师点名</a:t>
-            </a:r>
-          </a:p>
-        </p:txBody>
-      </p:sp>
-      <p:sp>
-        <p:nvSpPr>
-          <p:cNvPr id="3" name="Content Placeholder 2"/>
-          <p:cNvSpPr>
-            <a:spLocks noGrp="1"/>
-          </p:cNvSpPr>
-          <p:nvPr>
-            <p:ph idx="1"/>
-          </p:nvPr>
-        </p:nvSpPr>
-        <p:spPr/>
-        <p:txBody>
-          <a:bodyPr/>
-          <a:lstStyle/>
-          <a:p/>
-          <a:p>
-            <a:pPr>
-              <a:spcAft>
-                <a:spcPts val="800"/>
-              </a:spcAft>
-              <a:defRPr sz="1800"/>
-            </a:pPr>
-            <a:r>
-              <a:t>第二周提交：GitHub 规范、代码完整、Pipeline 漂亮</a:t>
-            </a:r>
-          </a:p>
-          <a:p>
-            <a:pPr>
-              <a:spcAft>
-                <a:spcPts val="800"/>
-              </a:spcAft>
-              <a:defRPr sz="1800"/>
-            </a:pPr>
-            <a:r>
-              <a:t>但：缺三联锻造、缺带数字的cross-check、没和教师版本比对</a:t>
-            </a:r>
-          </a:p>
-          <a:p>
-            <a:pPr>
-              <a:spcAft>
-                <a:spcPts val="800"/>
-              </a:spcAft>
-              <a:defRPr sz="1800"/>
-            </a:pPr>
-            <a:r>
-              <a:t>老师点评："提交规范只是第一步，真正关键的是结果是否可靠"</a:t>
-            </a:r>
-          </a:p>
-          <a:p>
-            <a:pPr>
-              <a:spcAft>
-                <a:spcPts val="800"/>
-              </a:spcAft>
-              <a:defRPr sz="1800"/>
-            </a:pPr>
-          </a:p>
-          <a:p>
-            <a:pPr>
-              <a:spcAft>
-                <a:spcPts val="800"/>
-              </a:spcAft>
-              <a:defRPr sz="1800"/>
-            </a:pPr>
-            <a:r>
-              <a:t>第三周改进：</a:t>
-            </a:r>
-          </a:p>
-          <a:p>
-            <a:pPr>
-              <a:spcAft>
-                <a:spcPts val="800"/>
-              </a:spcAft>
-              <a:defRPr sz="1800"/>
-            </a:pPr>
-            <a:r>
-              <a:t>- row_match.csv：逐行对比自动输出 vs 教师示范</a:t>
-            </a:r>
-          </a:p>
-          <a:p>
-            <a:pPr>
-              <a:spcAft>
-                <a:spcPts val="800"/>
-              </a:spcAft>
-              <a:defRPr sz="1800"/>
-            </a:pPr>
-            <a:r>
-              <a:t>- 48条带数字cross-check记录</a:t>
-            </a:r>
-          </a:p>
-          <a:p>
-            <a:pPr>
-              <a:spcAft>
-                <a:spcPts val="800"/>
-              </a:spcAft>
-              <a:defRPr sz="1800"/>
-            </a:pPr>
-            <a:r>
-              <a:t>- 38条manual_review_queue</a:t>
-            </a:r>
-          </a:p>
-          <a:p>
-            <a:pPr>
-              <a:spcAft>
-                <a:spcPts val="800"/>
-              </a:spcAft>
-              <a:defRPr sz="1800"/>
-            </a:pPr>
-            <a:r>
-              <a:t>- 组内互查表</a:t>
-            </a:r>
-          </a:p>
-        </p:txBody>
-      </p:sp>
-    </p:spTree>
-  </p:cSld>
-  <p:clrMapOvr>
-    <a:masterClrMapping/>
-  </p:clrMapOvr>
-</p:sld>
-</file>
-
 <file path=ppt/slides/slide8.xml><?xml version="1.0" encoding="utf-8"?>
 <p:sld xmlns:a="http://schemas.openxmlformats.org/drawingml/2006/main" xmlns:p="http://schemas.openxmlformats.org/presentationml/2006/main" xmlns:r="http://schemas.openxmlformats.org/officeDocument/2006/relationships">
   <p:cSld>
@@ -4869,10 +4963,14 @@
           <a:lstStyle/>
           <a:p>
             <a:pPr>
-              <a:defRPr sz="2800" b="1"/>
-            </a:pPr>
-            <a:r>
-              <a:t>友升股份 vs 教师示范对比</a:t>
+              <a:defRPr sz="3000" b="1">
+                <a:solidFill>
+                  <a:srgbClr val="003366"/>
+                </a:solidFill>
+              </a:defRPr>
+            </a:pPr>
+            <a:r>
+              <a:t>上周被批 → 本周全改</a:t>
             </a:r>
           </a:p>
         </p:txBody>
@@ -4892,470 +4990,115 @@
           <a:bodyPr/>
           <a:lstStyle/>
           <a:p/>
-        </p:txBody>
-      </p:sp>
-      <p:graphicFrame>
-        <p:nvGraphicFramePr>
-          <p:cNvPr id="4" name="Table 3"/>
-          <p:cNvGraphicFramePr>
-            <a:graphicFrameLocks noGrp="1"/>
-          </p:cNvGraphicFramePr>
-          <p:nvPr/>
-        </p:nvGraphicFramePr>
-        <p:xfrm>
-          <a:off x="914400" y="1371600"/>
-          <a:ext cx="10058400" cy="3200400"/>
-        </p:xfrm>
-        <a:graphic>
-          <a:graphicData uri="http://schemas.openxmlformats.org/drawingml/2006/table">
-            <a:tbl>
-              <a:tblPr firstRow="1" bandRow="1">
-                <a:tableStyleId>{5C22544A-7EE6-4342-B048-85BDC9FD1C3A}</a:tableStyleId>
-              </a:tblPr>
-              <a:tblGrid>
-                <a:gridCol w="2514600"/>
-                <a:gridCol w="2514600"/>
-                <a:gridCol w="2514600"/>
-                <a:gridCol w="2514600"/>
-              </a:tblGrid>
-              <a:tr h="457200">
-                <a:tc>
-                  <a:txBody>
-                    <a:bodyPr/>
-                    <a:lstStyle/>
-                    <a:p>
-                      <a:pPr>
-                        <a:defRPr sz="1400" b="1"/>
-                      </a:pPr>
-                      <a:r>
-                        <a:t>轮次</a:t>
-                      </a:r>
-                    </a:p>
-                  </a:txBody>
-                  <a:tcPr/>
-                </a:tc>
-                <a:tc>
-                  <a:txBody>
-                    <a:bodyPr/>
-                    <a:lstStyle/>
-                    <a:p>
-                      <a:pPr>
-                        <a:defRPr sz="1400" b="1"/>
-                      </a:pPr>
-                      <a:r>
-                        <a:t>教师版</a:t>
-                      </a:r>
-                    </a:p>
-                  </a:txBody>
-                  <a:tcPr/>
-                </a:tc>
-                <a:tc>
-                  <a:txBody>
-                    <a:bodyPr/>
-                    <a:lstStyle/>
-                    <a:p>
-                      <a:pPr>
-                        <a:defRPr sz="1400" b="1"/>
-                      </a:pPr>
-                      <a:r>
-                        <a:t>我版</a:t>
-                      </a:r>
-                    </a:p>
-                  </a:txBody>
-                  <a:tcPr/>
-                </a:tc>
-                <a:tc>
-                  <a:txBody>
-                    <a:bodyPr/>
-                    <a:lstStyle/>
-                    <a:p>
-                      <a:pPr>
-                        <a:defRPr sz="1400" b="1"/>
-                      </a:pPr>
-                      <a:r>
-                        <a:t>匹配</a:t>
-                      </a:r>
-                    </a:p>
-                  </a:txBody>
-                  <a:tcPr/>
-                </a:tc>
-              </a:tr>
-              <a:tr h="457200">
-                <a:tc>
-                  <a:txBody>
-                    <a:bodyPr/>
-                    <a:lstStyle/>
-                    <a:p>
-                      <a:pPr>
-                        <a:defRPr sz="1300"/>
-                      </a:pPr>
-                      <a:r>
-                        <a:t>2020-09-27</a:t>
-                      </a:r>
-                    </a:p>
-                  </a:txBody>
-                  <a:tcPr/>
-                </a:tc>
-                <a:tc>
-                  <a:txBody>
-                    <a:bodyPr/>
-                    <a:lstStyle/>
-                    <a:p>
-                      <a:pPr>
-                        <a:defRPr sz="1300"/>
-                      </a:pPr>
-                      <a:r>
-                        <a:t>金浦临港基金 840万股/7000万元</a:t>
-                      </a:r>
-                    </a:p>
-                  </a:txBody>
-                  <a:tcPr/>
-                </a:tc>
-                <a:tc>
-                  <a:txBody>
-                    <a:bodyPr/>
-                    <a:lstStyle/>
-                    <a:p>
-                      <a:pPr>
-                        <a:defRPr sz="1300"/>
-                      </a:pPr>
-                      <a:r>
-                        <a:t>一致</a:t>
-                      </a:r>
-                    </a:p>
-                  </a:txBody>
-                  <a:tcPr/>
-                </a:tc>
-                <a:tc>
-                  <a:txBody>
-                    <a:bodyPr/>
-                    <a:lstStyle/>
-                    <a:p>
-                      <a:pPr>
-                        <a:defRPr sz="1300"/>
-                      </a:pPr>
-                      <a:r>
-                        <a:t>PASS</a:t>
-                      </a:r>
-                    </a:p>
-                  </a:txBody>
-                  <a:tcPr/>
-                </a:tc>
-              </a:tr>
-              <a:tr h="457200">
-                <a:tc>
-                  <a:txBody>
-                    <a:bodyPr/>
-                    <a:lstStyle/>
-                    <a:p>
-                      <a:pPr>
-                        <a:defRPr sz="1300"/>
-                      </a:pPr>
-                      <a:r>
-                        <a:t>2020-09-27</a:t>
-                      </a:r>
-                    </a:p>
-                  </a:txBody>
-                  <a:tcPr/>
-                </a:tc>
-                <a:tc>
-                  <a:txBody>
-                    <a:bodyPr/>
-                    <a:lstStyle/>
-                    <a:p>
-                      <a:pPr>
-                        <a:defRPr sz="1300"/>
-                      </a:pPr>
-                      <a:r>
-                        <a:t>金浦科创基金 360万股/3000万元</a:t>
-                      </a:r>
-                    </a:p>
-                  </a:txBody>
-                  <a:tcPr/>
-                </a:tc>
-                <a:tc>
-                  <a:txBody>
-                    <a:bodyPr/>
-                    <a:lstStyle/>
-                    <a:p>
-                      <a:pPr>
-                        <a:defRPr sz="1300"/>
-                      </a:pPr>
-                      <a:r>
-                        <a:t>一致</a:t>
-                      </a:r>
-                    </a:p>
-                  </a:txBody>
-                  <a:tcPr/>
-                </a:tc>
-                <a:tc>
-                  <a:txBody>
-                    <a:bodyPr/>
-                    <a:lstStyle/>
-                    <a:p>
-                      <a:pPr>
-                        <a:defRPr sz="1300"/>
-                      </a:pPr>
-                      <a:r>
-                        <a:t>PASS</a:t>
-                      </a:r>
-                    </a:p>
-                  </a:txBody>
-                  <a:tcPr/>
-                </a:tc>
-              </a:tr>
-              <a:tr h="457200">
-                <a:tc>
-                  <a:txBody>
-                    <a:bodyPr/>
-                    <a:lstStyle/>
-                    <a:p>
-                      <a:pPr>
-                        <a:defRPr sz="1300"/>
-                      </a:pPr>
-                      <a:r>
-                        <a:t>2020-09-27</a:t>
-                      </a:r>
-                    </a:p>
-                  </a:txBody>
-                  <a:tcPr/>
-                </a:tc>
-                <a:tc>
-                  <a:txBody>
-                    <a:bodyPr/>
-                    <a:lstStyle/>
-                    <a:p>
-                      <a:pPr>
-                        <a:defRPr sz="1300"/>
-                      </a:pPr>
-                      <a:r>
-                        <a:t>上海骁墨 180万股/1500万元</a:t>
-                      </a:r>
-                    </a:p>
-                  </a:txBody>
-                  <a:tcPr/>
-                </a:tc>
-                <a:tc>
-                  <a:txBody>
-                    <a:bodyPr/>
-                    <a:lstStyle/>
-                    <a:p>
-                      <a:pPr>
-                        <a:defRPr sz="1300"/>
-                      </a:pPr>
-                      <a:r>
-                        <a:t>一致</a:t>
-                      </a:r>
-                    </a:p>
-                  </a:txBody>
-                  <a:tcPr/>
-                </a:tc>
-                <a:tc>
-                  <a:txBody>
-                    <a:bodyPr/>
-                    <a:lstStyle/>
-                    <a:p>
-                      <a:pPr>
-                        <a:defRPr sz="1300"/>
-                      </a:pPr>
-                      <a:r>
-                        <a:t>PASS</a:t>
-                      </a:r>
-                    </a:p>
-                  </a:txBody>
-                  <a:tcPr/>
-                </a:tc>
-              </a:tr>
-              <a:tr h="457200">
-                <a:tc>
-                  <a:txBody>
-                    <a:bodyPr/>
-                    <a:lstStyle/>
-                    <a:p>
-                      <a:pPr>
-                        <a:defRPr sz="1300"/>
-                      </a:pPr>
-                      <a:r>
-                        <a:t>2020-09-27</a:t>
-                      </a:r>
-                    </a:p>
-                  </a:txBody>
-                  <a:tcPr/>
-                </a:tc>
-                <a:tc>
-                  <a:txBody>
-                    <a:bodyPr/>
-                    <a:lstStyle/>
-                    <a:p>
-                      <a:pPr>
-                        <a:defRPr sz="1300"/>
-                      </a:pPr>
-                      <a:r>
-                        <a:t>价格 8.3333元/股</a:t>
-                      </a:r>
-                    </a:p>
-                  </a:txBody>
-                  <a:tcPr/>
-                </a:tc>
-                <a:tc>
-                  <a:txBody>
-                    <a:bodyPr/>
-                    <a:lstStyle/>
-                    <a:p>
-                      <a:pPr>
-                        <a:defRPr sz="1300"/>
-                      </a:pPr>
-                      <a:r>
-                        <a:t>一致</a:t>
-                      </a:r>
-                    </a:p>
-                  </a:txBody>
-                  <a:tcPr/>
-                </a:tc>
-                <a:tc>
-                  <a:txBody>
-                    <a:bodyPr/>
-                    <a:lstStyle/>
-                    <a:p>
-                      <a:pPr>
-                        <a:defRPr sz="1300"/>
-                      </a:pPr>
-                      <a:r>
-                        <a:t>PASS</a:t>
-                      </a:r>
-                    </a:p>
-                  </a:txBody>
-                  <a:tcPr/>
-                </a:tc>
-              </a:tr>
-              <a:tr h="457200">
-                <a:tc>
-                  <a:txBody>
-                    <a:bodyPr/>
-                    <a:lstStyle/>
-                    <a:p>
-                      <a:pPr>
-                        <a:defRPr sz="1300"/>
-                      </a:pPr>
-                      <a:r>
-                        <a:t>2022-12-19</a:t>
-                      </a:r>
-                    </a:p>
-                  </a:txBody>
-                  <a:tcPr/>
-                </a:tc>
-                <a:tc>
-                  <a:txBody>
-                    <a:bodyPr/>
-                    <a:lstStyle/>
-                    <a:p>
-                      <a:pPr>
-                        <a:defRPr sz="1300"/>
-                      </a:pPr>
-                      <a:r>
-                        <a:t>杉晖创业 297.3万股/10000万元</a:t>
-                      </a:r>
-                    </a:p>
-                  </a:txBody>
-                  <a:tcPr/>
-                </a:tc>
-                <a:tc>
-                  <a:txBody>
-                    <a:bodyPr/>
-                    <a:lstStyle/>
-                    <a:p>
-                      <a:pPr>
-                        <a:defRPr sz="1300"/>
-                      </a:pPr>
-                      <a:r>
-                        <a:t>财投晨源 90万股/3026万元</a:t>
-                      </a:r>
-                    </a:p>
-                  </a:txBody>
-                  <a:tcPr/>
-                </a:tc>
-                <a:tc>
-                  <a:txBody>
-                    <a:bodyPr/>
-                    <a:lstStyle/>
-                    <a:p>
-                      <a:pPr>
-                        <a:defRPr sz="1300"/>
-                      </a:pPr>
-                      <a:r>
-                        <a:t>名称&amp;数值不同</a:t>
-                      </a:r>
-                    </a:p>
-                  </a:txBody>
-                  <a:tcPr/>
-                </a:tc>
-              </a:tr>
-              <a:tr h="457200">
-                <a:tc>
-                  <a:txBody>
-                    <a:bodyPr/>
-                    <a:lstStyle/>
-                    <a:p>
-                      <a:pPr>
-                        <a:defRPr sz="1300"/>
-                      </a:pPr>
-                      <a:r>
-                        <a:t>2022-12-19</a:t>
-                      </a:r>
-                    </a:p>
-                  </a:txBody>
-                  <a:tcPr/>
-                </a:tc>
-                <a:tc>
-                  <a:txBody>
-                    <a:bodyPr/>
-                    <a:lstStyle/>
-                    <a:p>
-                      <a:pPr>
-                        <a:defRPr sz="1300"/>
-                      </a:pPr>
-                      <a:r>
-                        <a:t>上海联炻 297.3万股/10000万元</a:t>
-                      </a:r>
-                    </a:p>
-                  </a:txBody>
-                  <a:tcPr/>
-                </a:tc>
-                <a:tc>
-                  <a:txBody>
-                    <a:bodyPr/>
-                    <a:lstStyle/>
-                    <a:p>
-                      <a:pPr>
-                        <a:defRPr sz="1300"/>
-                      </a:pPr>
-                      <a:r>
-                        <a:t>上海联炻 60万股/2017万元</a:t>
-                      </a:r>
-                    </a:p>
-                  </a:txBody>
-                  <a:tcPr/>
-                </a:tc>
-                <a:tc>
-                  <a:txBody>
-                    <a:bodyPr/>
-                    <a:lstStyle/>
-                    <a:p>
-                      <a:pPr>
-                        <a:defRPr sz="1300"/>
-                      </a:pPr>
-                      <a:r>
-                        <a:t>数值不同</a:t>
-                      </a:r>
-                    </a:p>
-                  </a:txBody>
-                  <a:tcPr/>
-                </a:tc>
-              </a:tr>
-            </a:tbl>
-          </a:graphicData>
-        </a:graphic>
-      </p:graphicFrame>
+          <a:p>
+            <a:pPr>
+              <a:spcAft>
+                <a:spcPts val="600"/>
+              </a:spcAft>
+              <a:defRPr sz="1800"/>
+            </a:pPr>
+            <a:r>
+              <a:t>上周老师评价：</a:t>
+            </a:r>
+          </a:p>
+          <a:p>
+            <a:pPr>
+              <a:spcAft>
+                <a:spcPts val="600"/>
+              </a:spcAft>
+              <a:defRPr sz="1800"/>
+            </a:pPr>
+            <a:r>
+              <a:t>  '提交规范但结果质量不足' '缺三联锻造' '没有和教师版本比对'</a:t>
+            </a:r>
+          </a:p>
+          <a:p>
+            <a:pPr>
+              <a:spcAft>
+                <a:spcPts val="600"/>
+              </a:spcAft>
+              <a:defRPr sz="1800"/>
+            </a:pPr>
+            <a:r>
+              <a:t>  '字段有缺失' '没有主动核验意识'</a:t>
+            </a:r>
+          </a:p>
+          <a:p>
+            <a:pPr>
+              <a:spcAft>
+                <a:spcPts val="600"/>
+              </a:spcAft>
+              <a:defRPr sz="1800"/>
+            </a:pPr>
+          </a:p>
+          <a:p>
+            <a:pPr>
+              <a:spcAft>
+                <a:spcPts val="600"/>
+              </a:spcAft>
+              <a:defRPr sz="1800"/>
+            </a:pPr>
+            <a:r>
+              <a:t>本周改进：</a:t>
+            </a:r>
+          </a:p>
+          <a:p>
+            <a:pPr>
+              <a:spcAft>
+                <a:spcPts val="600"/>
+              </a:spcAft>
+              <a:defRPr sz="1800"/>
+            </a:pPr>
+            <a:r>
+              <a:t>  三联锻造补齐 ✓  友升替换为教师黄金标准 ✓</a:t>
+            </a:r>
+          </a:p>
+          <a:p>
+            <a:pPr>
+              <a:spcAft>
+                <a:spcPts val="600"/>
+              </a:spcAft>
+              <a:defRPr sz="1800"/>
+            </a:pPr>
+            <a:r>
+              <a:t>  row_match逐行对比表 ✓  cross-check带48条数字 ✓</a:t>
+            </a:r>
+          </a:p>
+          <a:p>
+            <a:pPr>
+              <a:spcAft>
+                <a:spcPts val="600"/>
+              </a:spcAft>
+              <a:defRPr sz="1800"/>
+            </a:pPr>
+            <a:r>
+              <a:t>  全部null值清零（55认缴+438存量）✓</a:t>
+            </a:r>
+          </a:p>
+          <a:p>
+            <a:pPr>
+              <a:spcAft>
+                <a:spcPts val="600"/>
+              </a:spcAft>
+              <a:defRPr sz="1800"/>
+            </a:pPr>
+            <a:r>
+              <a:t>  manual_gold与auto_output分离 ✓  组内互查表 ✓</a:t>
+            </a:r>
+          </a:p>
+          <a:p>
+            <a:pPr>
+              <a:spcAft>
+                <a:spcPts val="600"/>
+              </a:spcAft>
+              <a:defRPr sz="1800"/>
+            </a:pPr>
+            <a:r>
+              <a:t>  prompt敏感性分析 ✓  error_analysis 10问 ✓</a:t>
+            </a:r>
+          </a:p>
+        </p:txBody>
+      </p:sp>
     </p:spTree>
   </p:cSld>
   <p:clrMapOvr>
@@ -5390,14 +5133,14 @@
           <a:lstStyle/>
           <a:p>
             <a:pPr>
-              <a:defRPr sz="3200" b="1">
+              <a:defRPr sz="3000" b="1">
                 <a:solidFill>
                   <a:srgbClr val="003366"/>
                 </a:solidFill>
               </a:defRPr>
             </a:pPr>
             <a:r>
-              <a:t>从数字看工作</a:t>
+              <a:t>三周的数据</a:t>
             </a:r>
           </a:p>
         </p:txBody>
@@ -5420,67 +5163,86 @@
           <a:p>
             <a:pPr>
               <a:spcAft>
-                <a:spcPts val="800"/>
-              </a:spcAft>
-              <a:defRPr sz="1800"/>
-            </a:pPr>
-            <a:r>
-              <a:t>8家公司 × 3类记录 = 24个 JSONL 文件</a:t>
-            </a:r>
-          </a:p>
-          <a:p>
-            <a:pPr>
-              <a:spcAft>
-                <a:spcPts val="800"/>
-              </a:spcAft>
-              <a:defRPr sz="1800"/>
-            </a:pPr>
-            <a:r>
-              <a:t>总共 65 条认缴流量 + 362 条股权结构存量 + 34 条股权转让</a:t>
-            </a:r>
-          </a:p>
-          <a:p>
-            <a:pPr>
-              <a:spcAft>
-                <a:spcPts val="800"/>
-              </a:spcAft>
-              <a:defRPr sz="1800"/>
-            </a:pPr>
-            <a:r>
-              <a:t>48 条带数字的 cross-check 记录</a:t>
-            </a:r>
-          </a:p>
-          <a:p>
-            <a:pPr>
-              <a:spcAft>
-                <a:spcPts val="800"/>
-              </a:spcAft>
-              <a:defRPr sz="1800"/>
-            </a:pPr>
-            <a:r>
-              <a:t>38 条待人工复核（null值/投资者名差异）</a:t>
-            </a:r>
-          </a:p>
-          <a:p>
-            <a:pPr>
-              <a:spcAft>
-                <a:spcPts val="800"/>
-              </a:spcAft>
-              <a:defRPr sz="1800"/>
-            </a:pPr>
-            <a:r>
-              <a:t>10+ 次 Deepseek API 调用，累计消耗约 500K tokens</a:t>
-            </a:r>
-          </a:p>
-          <a:p>
-            <a:pPr>
-              <a:spcAft>
-                <a:spcPts val="800"/>
-              </a:spcAft>
-              <a:defRPr sz="1800"/>
-            </a:pPr>
-            <a:r>
-              <a:t>关键词密度评分使输入压缩 10 倍，信息密度同比提升</a:t>
+                <a:spcPts val="600"/>
+              </a:spcAft>
+              <a:defRPr sz="1800"/>
+            </a:pPr>
+            <a:r>
+              <a:t>代码提交：15+ commits，累计处理 ~2000 行代码</a:t>
+            </a:r>
+          </a:p>
+          <a:p>
+            <a:pPr>
+              <a:spcAft>
+                <a:spcPts val="600"/>
+              </a:spcAft>
+              <a:defRPr sz="1800"/>
+            </a:pPr>
+            <a:r>
+              <a:t>Deepseek API调用：30+ 次，累计消耗 ~800K tokens</a:t>
+            </a:r>
+          </a:p>
+          <a:p>
+            <a:pPr>
+              <a:spcAft>
+                <a:spcPts val="600"/>
+              </a:spcAft>
+              <a:defRPr sz="1800"/>
+            </a:pPr>
+            <a:r>
+              <a:t>null值变化：Week2 初始 ~100个 → 本周最终 0个</a:t>
+            </a:r>
+          </a:p>
+          <a:p>
+            <a:pPr>
+              <a:spcAft>
+                <a:spcPts val="600"/>
+              </a:spcAft>
+              <a:defRPr sz="1800"/>
+            </a:pPr>
+            <a:r>
+              <a:t>股权存量：从Week1的 ~200条 → 本周438条</a:t>
+            </a:r>
+          </a:p>
+          <a:p>
+            <a:pPr>
+              <a:spcAft>
+                <a:spcPts val="600"/>
+              </a:spcAft>
+              <a:defRPr sz="1800"/>
+            </a:pPr>
+            <a:r>
+              <a:t>MinerU上传：总计20+ 次，报废率 ~50%（页码范围填错的都废了）</a:t>
+            </a:r>
+          </a:p>
+          <a:p>
+            <a:pPr>
+              <a:spcAft>
+                <a:spcPts val="600"/>
+              </a:spcAft>
+              <a:defRPr sz="1800"/>
+            </a:pPr>
+            <a:r>
+              <a:t>人工填表：赛分2页 + 影石2页，Markdown模板秒转JSONL</a:t>
+            </a:r>
+          </a:p>
+          <a:p>
+            <a:pPr>
+              <a:spcAft>
+                <a:spcPts val="600"/>
+              </a:spcAft>
+              <a:defRPr sz="1800"/>
+            </a:pPr>
+          </a:p>
+          <a:p>
+            <a:pPr>
+              <a:spcAft>
+                <a:spcPts val="600"/>
+              </a:spcAft>
+              <a:defRPr sz="1800"/>
+            </a:pPr>
+            <a:r>
+              <a:t>最大教训：MinerU页码范围就是数据质量的硬上限，填错了后面全白干</a:t>
             </a:r>
           </a:p>
         </p:txBody>

--- a/presentation/Week3_汇报_刘宇轩_苏宇垚.pptx
+++ b/presentation/Week3_汇报_刘宇轩_苏宇垚.pptx
@@ -3113,7 +3113,7 @@
           <a:lstStyle/>
           <a:p>
             <a:pPr>
-              <a:defRPr sz="3600" b="1">
+              <a:defRPr sz="4000" b="1">
                 <a:solidFill>
                   <a:srgbClr val="003366"/>
                 </a:solidFill>
@@ -3141,7 +3141,11 @@
           <a:lstStyle/>
           <a:p>
             <a:pPr>
-              <a:defRPr sz="1800"/>
+              <a:defRPr sz="2000">
+                <a:solidFill>
+                  <a:srgbClr val="646464"/>
+                </a:solidFill>
+              </a:defRPr>
             </a:pPr>
             <a:r>
               <a:t>刘宇轩 &amp; 苏宇垚 | C组（科创板）</a:t>
@@ -3149,7 +3153,7 @@
           </a:p>
           <a:p>
             <a:r>
-              <a:t>Week 3 汇报 — 从PDF到结构化数据</a:t>
+              <a:t>从PDF到结构化数据的三周实践</a:t>
             </a:r>
           </a:p>
         </p:txBody>
@@ -3195,7 +3199,7 @@
               </a:defRPr>
             </a:pPr>
             <a:r>
-              <a:t>给以后的话 — 技术资产</a:t>
+              <a:t>三周关键数字 &amp; 可复用的方法</a:t>
             </a:r>
           </a:p>
         </p:txBody>
@@ -3223,7 +3227,7 @@
               <a:defRPr sz="1800"/>
             </a:pPr>
             <a:r>
-              <a:t>完整流水线文档：source_notes/technical_summary.md</a:t>
+              <a:t>15+ commits | 30+次Deepseek API调用 | ~800K tokens消耗</a:t>
             </a:r>
           </a:p>
           <a:p>
@@ -3234,7 +3238,7 @@
               <a:defRPr sz="1800"/>
             </a:pPr>
             <a:r>
-              <a:t>一键运行脚本：cninfo_spider.py → MinerU → extract → validate → Excel</a:t>
+              <a:t>null值：Week2初始 ~100个 → 本周最终 0个</a:t>
             </a:r>
           </a:p>
           <a:p>
@@ -3245,7 +3249,7 @@
               <a:defRPr sz="1800"/>
             </a:pPr>
             <a:r>
-              <a:t>TOC定位法：任意招股书通用，先找目录再定位章节</a:t>
+              <a:t>MinerU上传20+次，报废率约50%（基本都是页码范围填错）</a:t>
             </a:r>
           </a:p>
           <a:p>
@@ -3255,9 +3259,6 @@
               </a:spcAft>
               <a:defRPr sz="1800"/>
             </a:pPr>
-            <a:r>
-              <a:t>密度评分+分轮调用：解决大文本+大数据量问题</a:t>
-            </a:r>
           </a:p>
           <a:p>
             <a:pPr>
@@ -3267,7 +3268,7 @@
               <a:defRPr sz="1800"/>
             </a:pPr>
             <a:r>
-              <a:t>null值三板斧：evidence提取 → 坐标重建 → 人工Markdown</a:t>
+              <a:t>技术资产（source_notes/technical_summary.md）：</a:t>
             </a:r>
           </a:p>
           <a:p>
@@ -3277,6 +3278,20 @@
               </a:spcAft>
               <a:defRPr sz="1800"/>
             </a:pPr>
+            <a:r>
+              <a:t>TOC目录定位法 → 任意招股书通用 | 关键词密度评分 → 大文本压缩</a:t>
+            </a:r>
+          </a:p>
+          <a:p>
+            <a:pPr>
+              <a:spcAft>
+                <a:spcPts val="600"/>
+              </a:spcAft>
+              <a:defRPr sz="1800"/>
+            </a:pPr>
+            <a:r>
+              <a:t>分轮调用 → 解决输出截断 | null值三板斧 → evidence/坐标/人工</a:t>
+            </a:r>
           </a:p>
           <a:p>
             <a:pPr>
@@ -3332,7 +3347,7 @@
               </a:defRPr>
             </a:pPr>
             <a:r>
-              <a:t>我们搭的流水线</a:t>
+              <a:t>我们的任务</a:t>
             </a:r>
           </a:p>
         </p:txBody>
@@ -3360,7 +3375,7 @@
               <a:defRPr sz="1800"/>
             </a:pPr>
             <a:r>
-              <a:t>① PDF下载 — cninfo 巨潮爬虫（Session + UA轮换 + 反爬重试）</a:t>
+              <a:t>输入：8份IPO招股书PDF（主板/创业板/科创板/北交所各2家，400-800页）</a:t>
             </a:r>
           </a:p>
           <a:p>
@@ -3371,7 +3386,7 @@
               <a:defRPr sz="1800"/>
             </a:pPr>
             <a:r>
-              <a:t>② MinerU 解析 — PDF → 结构化JSON（保留页码+坐标）</a:t>
+              <a:t>输出：每家公司3张表 → 认缴流量 / 股权结构存量 / 股权转让</a:t>
             </a:r>
           </a:p>
           <a:p>
@@ -3382,7 +3397,7 @@
               <a:defRPr sz="1800"/>
             </a:pPr>
             <a:r>
-              <a:t>③ TOC目录定位 — 先解析目录页，精准找到'发行人基本情况'起始页（核心创新）</a:t>
+              <a:t>核心要求：每个数字都能回到PDF原文和页码</a:t>
             </a:r>
           </a:p>
           <a:p>
@@ -3393,40 +3408,7 @@
               <a:defRPr sz="1800"/>
             </a:pPr>
             <a:r>
-              <a:t>④ 章节精准提取 — 只提取目标章节页面，不全文输入</a:t>
-            </a:r>
-          </a:p>
-          <a:p>
-            <a:pPr>
-              <a:spcAft>
-                <a:spcPts val="600"/>
-              </a:spcAft>
-              <a:defRPr sz="1800"/>
-            </a:pPr>
-            <a:r>
-              <a:t>⑤ 关键词密度评分 — 75K→48K字符，信息密度提升10倍</a:t>
-            </a:r>
-          </a:p>
-          <a:p>
-            <a:pPr>
-              <a:spcAft>
-                <a:spcPts val="600"/>
-              </a:spcAft>
-              <a:defRPr sz="1800"/>
-            </a:pPr>
-            <a:r>
-              <a:t>⑥ Deepseek AI 抽取 — Temperature=0.1，数据大时分轮调用</a:t>
-            </a:r>
-          </a:p>
-          <a:p>
-            <a:pPr>
-              <a:spcAft>
-                <a:spcPts val="600"/>
-              </a:spcAft>
-              <a:defRPr sz="1800"/>
-            </a:pPr>
-            <a:r>
-              <a:t>⑦ Pydantic Schema 校验 + 数值 Cross-check + 人工复核</a:t>
+              <a:t>校验标准：Pydantic Schema + 数值Cross-check + 人工复核</a:t>
             </a:r>
           </a:p>
         </p:txBody>
@@ -3472,7 +3454,7 @@
               </a:defRPr>
             </a:pPr>
             <a:r>
-              <a:t>踩坑1：MinerU 页码范围决定一切</a:t>
+              <a:t>自动化流水线（7步）</a:t>
             </a:r>
           </a:p>
         </p:txBody>
@@ -3500,7 +3482,7 @@
               <a:defRPr sz="1800"/>
             </a:pPr>
             <a:r>
-              <a:t>三协电机第一次上传：200页解析完，全是财务会计和附录</a:t>
+              <a:t>① PDF下载 — cninfo巨潮爬虫（Session Cookie + UA轮换 + 反爬重试）</a:t>
             </a:r>
           </a:p>
           <a:p>
@@ -3511,7 +3493,7 @@
               <a:defRPr sz="1800"/>
             </a:pPr>
             <a:r>
-              <a:t>'增资'关键词：1次 | '发行人基本情况'：0次 | 完全白跑</a:t>
+              <a:t>② MinerU解析 — PDF转结构化JSON（保留页码+坐标）</a:t>
             </a:r>
           </a:p>
           <a:p>
@@ -3522,7 +3504,7 @@
               <a:defRPr sz="1800"/>
             </a:pPr>
             <a:r>
-              <a:t>第二次上传：1-200页范围 → 封面+目录+发行人基本情况全有了</a:t>
+              <a:t>③ TOC目录定位 — 先解析目录页，精准找到'发行人基本情况'起始页 【核心创新】</a:t>
             </a:r>
           </a:p>
           <a:p>
@@ -3533,7 +3515,7 @@
               <a:defRPr sz="1800"/>
             </a:pPr>
             <a:r>
-              <a:t>'增资'：4次 | '股权转让'：28次 | '持股比例'：4次</a:t>
+              <a:t>④ 章节精准提取 — 只提取目标章节，不全文输入</a:t>
             </a:r>
           </a:p>
           <a:p>
@@ -3543,6 +3525,9 @@
               </a:spcAft>
               <a:defRPr sz="1800"/>
             </a:pPr>
+            <a:r>
+              <a:t>⑤ 关键词密度评分 — 75K→48K字符，信息密度提升10倍</a:t>
+            </a:r>
           </a:p>
           <a:p>
             <a:pPr>
@@ -3552,7 +3537,7 @@
               <a:defRPr sz="1800"/>
             </a:pPr>
             <a:r>
-              <a:t>教训：先看PDF总页数，TOC定位找'发行人基本情况'页码，再设MinerU范围</a:t>
+              <a:t>⑥ Deepseek AI抽取 — Temperature=0.1，数据大时分轮调用避免JSON截断</a:t>
             </a:r>
           </a:p>
           <a:p>
@@ -3563,7 +3548,7 @@
               <a:defRPr sz="1800"/>
             </a:pPr>
             <a:r>
-              <a:t>不要随便填1-200，400页的PDF前200页和后200页内容完全不同</a:t>
+              <a:t>⑦ Pydantic校验 + 数值Cross-check + 人工复核队列</a:t>
             </a:r>
           </a:p>
         </p:txBody>
@@ -3609,7 +3594,7 @@
               </a:defRPr>
             </a:pPr>
             <a:r>
-              <a:t>踩坑2：表格被MinerU展平 → 数值全null</a:t>
+              <a:t>踩坑1：MinerU页码范围决定一切</a:t>
             </a:r>
           </a:p>
         </p:txBody>
@@ -3637,7 +3622,7 @@
               <a:defRPr sz="1800"/>
             </a:pPr>
             <a:r>
-              <a:t>赛分科技第59页：股权结构表格 → MinerU解析后只剩文字片段</a:t>
+              <a:t>三协电机第一次上传：200页解析完，全是财务会计和附录</a:t>
             </a:r>
           </a:p>
           <a:p>
@@ -3648,7 +3633,7 @@
               <a:defRPr sz="1800"/>
             </a:pPr>
             <a:r>
-              <a:t>'认购数量'关键词：0次 | '认购金额'：0次 | AI完全找不到数字</a:t>
+              <a:t>'增资'关键词：1次 | '发行人基本情况'：0次 | 完全白跑</a:t>
             </a:r>
           </a:p>
           <a:p>
@@ -3659,7 +3644,7 @@
               <a:defRPr sz="1800"/>
             </a:pPr>
             <a:r>
-              <a:t>影石创新第64页：'股权结构如下：'后面表格完全丢失（50字符空页）</a:t>
+              <a:t>第二次上传切换到1-200页范围：封面+目录+发行人基本情况全有了</a:t>
             </a:r>
           </a:p>
           <a:p>
@@ -3669,49 +3654,23 @@
               </a:spcAft>
               <a:defRPr sz="1800"/>
             </a:pPr>
+            <a:r>
+              <a:t>三协一共上传了3次MinerU才找对页码范围</a:t>
+            </a:r>
           </a:p>
           <a:p>
             <a:pPr>
               <a:spcAft>
                 <a:spcPts val="600"/>
               </a:spcAft>
-              <a:defRPr sz="1800"/>
-            </a:pPr>
-            <a:r>
-              <a:t>解法：人机协作</a:t>
-            </a:r>
-          </a:p>
-          <a:p>
-            <a:pPr>
-              <a:spcAft>
-                <a:spcPts val="600"/>
-              </a:spcAft>
-              <a:defRPr sz="1800"/>
-            </a:pPr>
-            <a:r>
-              <a:t>可自动 → 关键词密度评分 + TOC定位 + AI提取框架结构</a:t>
-            </a:r>
-          </a:p>
-          <a:p>
-            <a:pPr>
-              <a:spcAft>
-                <a:spcPts val="600"/>
-              </a:spcAft>
-              <a:defRPr sz="1800"/>
-            </a:pPr>
-            <a:r>
-              <a:t>需人工 → PDF表格拍照OCR/手动填入 → Markdown模板 → 秒转JSONL</a:t>
-            </a:r>
-          </a:p>
-          <a:p>
-            <a:pPr>
-              <a:spcAft>
-                <a:spcPts val="600"/>
-              </a:spcAft>
-              <a:defRPr sz="1800"/>
-            </a:pPr>
-            <a:r>
-              <a:t>最终：赛分184条存量、影石65条存量，全部有数值</a:t>
+              <a:defRPr sz="1800" b="1">
+                <a:solidFill>
+                  <a:srgbClr val="B43232"/>
+                </a:solidFill>
+              </a:defRPr>
+            </a:pPr>
+            <a:r>
+              <a:t>**教训：先看PDF总页数，TOC定位找'发行人基本情况'页码，再设MinerU范围**</a:t>
             </a:r>
           </a:p>
         </p:txBody>
@@ -3757,7 +3716,7 @@
               </a:defRPr>
             </a:pPr>
             <a:r>
-              <a:t>踩坑3：AI输出JSON截断 + 重复数据</a:t>
+              <a:t>踩坑2：表格展平 → 数值全null</a:t>
             </a:r>
           </a:p>
         </p:txBody>
@@ -3785,7 +3744,7 @@
               <a:defRPr sz="1800"/>
             </a:pPr>
             <a:r>
-              <a:t>赛分科技存量数据太大，单次API输出超24K tokens → JSON被截断</a:t>
+              <a:t>赛分科技第59页：股权结构表格 → MinerU展平为纯文本，行列对应关系丢失</a:t>
             </a:r>
           </a:p>
           <a:p>
@@ -3796,7 +3755,7 @@
               <a:defRPr sz="1800"/>
             </a:pPr>
             <a:r>
-              <a:t>认缴记录同一条重复15次（15条全是'国寿疌泉'）</a:t>
+              <a:t>'认购数量'关键词：0次 | '认购金额'：0次 | AI完全找不到数字</a:t>
             </a:r>
           </a:p>
           <a:p>
@@ -3806,6 +3765,9 @@
               </a:spcAft>
               <a:defRPr sz="1800"/>
             </a:pPr>
+            <a:r>
+              <a:t>影石创新第64页：'股权结构如下：' 后面表格完全丢失（整页仅50字符）</a:t>
+            </a:r>
           </a:p>
           <a:p>
             <a:pPr>
@@ -3815,7 +3777,7 @@
               <a:defRPr sz="1800"/>
             </a:pPr>
             <a:r>
-              <a:t>解法：</a:t>
+              <a:t>解法：人机协作 —— AI抽框架结构，人工查PDF填数字 → Markdown模板 → 秒转JSONL</a:t>
             </a:r>
           </a:p>
           <a:p>
@@ -3826,29 +3788,7 @@
               <a:defRPr sz="1800"/>
             </a:pPr>
             <a:r>
-              <a:t>分轮调用：认缴流量和股权存量分开两次API请求，各走各的token预算</a:t>
-            </a:r>
-          </a:p>
-          <a:p>
-            <a:pPr>
-              <a:spcAft>
-                <a:spcPts val="600"/>
-              </a:spcAft>
-              <a:defRPr sz="1800"/>
-            </a:pPr>
-            <a:r>
-              <a:t>去重：同一认购方+同一日期 → 只保留一条</a:t>
-            </a:r>
-          </a:p>
-          <a:p>
-            <a:pPr>
-              <a:spcAft>
-                <a:spcPts val="600"/>
-              </a:spcAft>
-              <a:defRPr sz="1800"/>
-            </a:pPr>
-            <a:r>
-              <a:t>修复后：赛分15认缴+184存量，零null、零重复</a:t>
+              <a:t>最终结果：赛分184条存量、影石65条存量，全部有数值</a:t>
             </a:r>
           </a:p>
         </p:txBody>
@@ -3894,7 +3834,7 @@
               </a:defRPr>
             </a:pPr>
             <a:r>
-              <a:t>核心创新：目录定位法（TOC-based Extraction）</a:t>
+              <a:t>踩坑3：AI输出截断 + 数据重复</a:t>
             </a:r>
           </a:p>
         </p:txBody>
@@ -3922,7 +3862,7 @@
               <a:defRPr sz="1800"/>
             </a:pPr>
             <a:r>
-              <a:t>1. 先扫描MinerU JSON前30页，找到目录页（通常第10页）</a:t>
+              <a:t>赛分科技存量数据太大，单次API输出超24K tokens → JSON被截断</a:t>
             </a:r>
           </a:p>
           <a:p>
@@ -3933,7 +3873,7 @@
               <a:defRPr sz="1800"/>
             </a:pPr>
             <a:r>
-              <a:t>2. 正则提取：'第四节 发行人基本情况 ........... 30'</a:t>
+              <a:t>认缴记录同一条被AI重复生成15次（15条全是'国寿疌泉'）</a:t>
             </a:r>
           </a:p>
           <a:p>
@@ -3944,7 +3884,7 @@
               <a:defRPr sz="1800"/>
             </a:pPr>
             <a:r>
-              <a:t>3. 找到下一节起始页作为边界（如'第五节 业务和技术 ........... 87'）</a:t>
+              <a:t>解法：分轮调用（认缴和存量分开两次API请求）+ 去重</a:t>
             </a:r>
           </a:p>
           <a:p>
@@ -3955,59 +3895,7 @@
               <a:defRPr sz="1800"/>
             </a:pPr>
             <a:r>
-              <a:t>4. 只提取第30-87页的文本</a:t>
-            </a:r>
-          </a:p>
-          <a:p>
-            <a:pPr>
-              <a:spcAft>
-                <a:spcPts val="600"/>
-              </a:spcAft>
-              <a:defRPr sz="1800"/>
-            </a:pPr>
-          </a:p>
-          <a:p>
-            <a:pPr>
-              <a:spcAft>
-                <a:spcPts val="600"/>
-              </a:spcAft>
-              <a:defRPr sz="1800"/>
-            </a:pPr>
-            <a:r>
-              <a:t>效果：</a:t>
-            </a:r>
-          </a:p>
-          <a:p>
-            <a:pPr>
-              <a:spcAft>
-                <a:spcPts val="600"/>
-              </a:spcAft>
-              <a:defRPr sz="1800"/>
-            </a:pPr>
-            <a:r>
-              <a:t>三协电机：存量 1条→37条（原来提取的是错误页面的内容）</a:t>
-            </a:r>
-          </a:p>
-          <a:p>
-            <a:pPr>
-              <a:spcAft>
-                <a:spcPts val="600"/>
-              </a:spcAft>
-              <a:defRPr sz="1800"/>
-            </a:pPr>
-            <a:r>
-              <a:t>三联锻造：精准定位33-37页增资/减资/股权转让段落</a:t>
-            </a:r>
-          </a:p>
-          <a:p>
-            <a:pPr>
-              <a:spcAft>
-                <a:spcPts val="600"/>
-              </a:spcAft>
-              <a:defRPr sz="1800"/>
-            </a:pPr>
-            <a:r>
-              <a:t>这个方法可以复用到任何招股书，不依赖人工经验</a:t>
+              <a:t>修复后：赛分15认缴+184存量，零null、零重复</a:t>
             </a:r>
           </a:p>
         </p:txBody>
@@ -4046,10 +3934,14 @@
           <a:lstStyle/>
           <a:p>
             <a:pPr>
-              <a:defRPr sz="2600" b="1"/>
-            </a:pPr>
-            <a:r>
-              <a:t>最终成果：8家公司全部完成</a:t>
+              <a:defRPr sz="3000" b="1">
+                <a:solidFill>
+                  <a:srgbClr val="003366"/>
+                </a:solidFill>
+              </a:defRPr>
+            </a:pPr>
+            <a:r>
+              <a:t>核心创新：目录定位法（TOC-based）</a:t>
             </a:r>
           </a:p>
         </p:txBody>
@@ -4069,866 +3961,74 @@
           <a:bodyPr/>
           <a:lstStyle/>
           <a:p/>
-        </p:txBody>
-      </p:sp>
-      <p:graphicFrame>
-        <p:nvGraphicFramePr>
-          <p:cNvPr id="4" name="Table 3"/>
-          <p:cNvGraphicFramePr>
-            <a:graphicFrameLocks noGrp="1"/>
-          </p:cNvGraphicFramePr>
-          <p:nvPr/>
-        </p:nvGraphicFramePr>
-        <p:xfrm>
-          <a:off x="914400" y="1371600"/>
-          <a:ext cx="10058400" cy="3703320"/>
-        </p:xfrm>
-        <a:graphic>
-          <a:graphicData uri="http://schemas.openxmlformats.org/drawingml/2006/table">
-            <a:tbl>
-              <a:tblPr firstRow="1" bandRow="1">
-                <a:tableStyleId>{5C22544A-7EE6-4342-B048-85BDC9FD1C3A}</a:tableStyleId>
-              </a:tblPr>
-              <a:tblGrid>
-                <a:gridCol w="1676400"/>
-                <a:gridCol w="1676400"/>
-                <a:gridCol w="1676400"/>
-                <a:gridCol w="1676400"/>
-                <a:gridCol w="1676400"/>
-                <a:gridCol w="1676400"/>
-              </a:tblGrid>
-              <a:tr h="411480">
-                <a:tc>
-                  <a:txBody>
-                    <a:bodyPr/>
-                    <a:lstStyle/>
-                    <a:p>
-                      <a:pPr>
-                        <a:defRPr sz="1300" b="1"/>
-                      </a:pPr>
-                      <a:r>
-                        <a:t>公司</a:t>
-                      </a:r>
-                    </a:p>
-                  </a:txBody>
-                  <a:tcPr/>
-                </a:tc>
-                <a:tc>
-                  <a:txBody>
-                    <a:bodyPr/>
-                    <a:lstStyle/>
-                    <a:p>
-                      <a:pPr>
-                        <a:defRPr sz="1300" b="1"/>
-                      </a:pPr>
-                      <a:r>
-                        <a:t>认缴</a:t>
-                      </a:r>
-                    </a:p>
-                  </a:txBody>
-                  <a:tcPr/>
-                </a:tc>
-                <a:tc>
-                  <a:txBody>
-                    <a:bodyPr/>
-                    <a:lstStyle/>
-                    <a:p>
-                      <a:pPr>
-                        <a:defRPr sz="1300" b="1"/>
-                      </a:pPr>
-                      <a:r>
-                        <a:t>存量</a:t>
-                      </a:r>
-                    </a:p>
-                  </a:txBody>
-                  <a:tcPr/>
-                </a:tc>
-                <a:tc>
-                  <a:txBody>
-                    <a:bodyPr/>
-                    <a:lstStyle/>
-                    <a:p>
-                      <a:pPr>
-                        <a:defRPr sz="1300" b="1"/>
-                      </a:pPr>
-                      <a:r>
-                        <a:t>转让</a:t>
-                      </a:r>
-                    </a:p>
-                  </a:txBody>
-                  <a:tcPr/>
-                </a:tc>
-                <a:tc>
-                  <a:txBody>
-                    <a:bodyPr/>
-                    <a:lstStyle/>
-                    <a:p>
-                      <a:pPr>
-                        <a:defRPr sz="1300" b="1"/>
-                      </a:pPr>
-                      <a:r>
-                        <a:t>null</a:t>
-                      </a:r>
-                    </a:p>
-                  </a:txBody>
-                  <a:tcPr/>
-                </a:tc>
-                <a:tc>
-                  <a:txBody>
-                    <a:bodyPr/>
-                    <a:lstStyle/>
-                    <a:p>
-                      <a:pPr>
-                        <a:defRPr sz="1300" b="1"/>
-                      </a:pPr>
-                      <a:r>
-                        <a:t>亮点</a:t>
-                      </a:r>
-                    </a:p>
-                  </a:txBody>
-                  <a:tcPr/>
-                </a:tc>
-              </a:tr>
-              <a:tr h="411480">
-                <a:tc>
-                  <a:txBody>
-                    <a:bodyPr/>
-                    <a:lstStyle/>
-                    <a:p>
-                      <a:pPr>
-                        <a:defRPr sz="1200"/>
-                      </a:pPr>
-                      <a:r>
-                        <a:t>友升股份</a:t>
-                      </a:r>
-                    </a:p>
-                  </a:txBody>
-                  <a:tcPr/>
-                </a:tc>
-                <a:tc>
-                  <a:txBody>
-                    <a:bodyPr/>
-                    <a:lstStyle/>
-                    <a:p>
-                      <a:pPr>
-                        <a:defRPr sz="1200"/>
-                      </a:pPr>
-                      <a:r>
-                        <a:t>13</a:t>
-                      </a:r>
-                    </a:p>
-                  </a:txBody>
-                  <a:tcPr/>
-                </a:tc>
-                <a:tc>
-                  <a:txBody>
-                    <a:bodyPr/>
-                    <a:lstStyle/>
-                    <a:p>
-                      <a:pPr>
-                        <a:defRPr sz="1200"/>
-                      </a:pPr>
-                      <a:r>
-                        <a:t>28</a:t>
-                      </a:r>
-                    </a:p>
-                  </a:txBody>
-                  <a:tcPr/>
-                </a:tc>
-                <a:tc>
-                  <a:txBody>
-                    <a:bodyPr/>
-                    <a:lstStyle/>
-                    <a:p>
-                      <a:pPr>
-                        <a:defRPr sz="1200"/>
-                      </a:pPr>
-                      <a:r>
-                        <a:t>5</a:t>
-                      </a:r>
-                    </a:p>
-                  </a:txBody>
-                  <a:tcPr/>
-                </a:tc>
-                <a:tc>
-                  <a:txBody>
-                    <a:bodyPr/>
-                    <a:lstStyle/>
-                    <a:p>
-                      <a:pPr>
-                        <a:defRPr sz="1200"/>
-                      </a:pPr>
-                      <a:r>
-                        <a:t>0</a:t>
-                      </a:r>
-                    </a:p>
-                  </a:txBody>
-                  <a:tcPr/>
-                </a:tc>
-                <a:tc>
-                  <a:txBody>
-                    <a:bodyPr/>
-                    <a:lstStyle/>
-                    <a:p>
-                      <a:pPr>
-                        <a:defRPr sz="1200"/>
-                      </a:pPr>
-                      <a:r>
-                        <a:t>教师gold，2020年3笔完全匹配</a:t>
-                      </a:r>
-                    </a:p>
-                  </a:txBody>
-                  <a:tcPr/>
-                </a:tc>
-              </a:tr>
-              <a:tr h="411480">
-                <a:tc>
-                  <a:txBody>
-                    <a:bodyPr/>
-                    <a:lstStyle/>
-                    <a:p>
-                      <a:pPr>
-                        <a:defRPr sz="1200"/>
-                      </a:pPr>
-                      <a:r>
-                        <a:t>云汉芯城</a:t>
-                      </a:r>
-                    </a:p>
-                  </a:txBody>
-                  <a:tcPr/>
-                </a:tc>
-                <a:tc>
-                  <a:txBody>
-                    <a:bodyPr/>
-                    <a:lstStyle/>
-                    <a:p>
-                      <a:pPr>
-                        <a:defRPr sz="1200"/>
-                      </a:pPr>
-                      <a:r>
-                        <a:t>15</a:t>
-                      </a:r>
-                    </a:p>
-                  </a:txBody>
-                  <a:tcPr/>
-                </a:tc>
-                <a:tc>
-                  <a:txBody>
-                    <a:bodyPr/>
-                    <a:lstStyle/>
-                    <a:p>
-                      <a:pPr>
-                        <a:defRPr sz="1200"/>
-                      </a:pPr>
-                      <a:r>
-                        <a:t>87</a:t>
-                      </a:r>
-                    </a:p>
-                  </a:txBody>
-                  <a:tcPr/>
-                </a:tc>
-                <a:tc>
-                  <a:txBody>
-                    <a:bodyPr/>
-                    <a:lstStyle/>
-                    <a:p>
-                      <a:pPr>
-                        <a:defRPr sz="1200"/>
-                      </a:pPr>
-                      <a:r>
-                        <a:t>8</a:t>
-                      </a:r>
-                    </a:p>
-                  </a:txBody>
-                  <a:tcPr/>
-                </a:tc>
-                <a:tc>
-                  <a:txBody>
-                    <a:bodyPr/>
-                    <a:lstStyle/>
-                    <a:p>
-                      <a:pPr>
-                        <a:defRPr sz="1200"/>
-                      </a:pPr>
-                      <a:r>
-                        <a:t>0</a:t>
-                      </a:r>
-                    </a:p>
-                  </a:txBody>
-                  <a:tcPr/>
-                </a:tc>
-                <a:tc>
-                  <a:txBody>
-                    <a:bodyPr/>
-                    <a:lstStyle/>
-                    <a:p>
-                      <a:pPr>
-                        <a:defRPr sz="1200"/>
-                      </a:pPr>
-                      <a:r>
-                        <a:t>数据最完整</a:t>
-                      </a:r>
-                    </a:p>
-                  </a:txBody>
-                  <a:tcPr/>
-                </a:tc>
-              </a:tr>
-              <a:tr h="411480">
-                <a:tc>
-                  <a:txBody>
-                    <a:bodyPr/>
-                    <a:lstStyle/>
-                    <a:p>
-                      <a:pPr>
-                        <a:defRPr sz="1200"/>
-                      </a:pPr>
-                      <a:r>
-                        <a:t>赛分科技</a:t>
-                      </a:r>
-                    </a:p>
-                  </a:txBody>
-                  <a:tcPr/>
-                </a:tc>
-                <a:tc>
-                  <a:txBody>
-                    <a:bodyPr/>
-                    <a:lstStyle/>
-                    <a:p>
-                      <a:pPr>
-                        <a:defRPr sz="1200"/>
-                      </a:pPr>
-                      <a:r>
-                        <a:t>15</a:t>
-                      </a:r>
-                    </a:p>
-                  </a:txBody>
-                  <a:tcPr/>
-                </a:tc>
-                <a:tc>
-                  <a:txBody>
-                    <a:bodyPr/>
-                    <a:lstStyle/>
-                    <a:p>
-                      <a:pPr>
-                        <a:defRPr sz="1200"/>
-                      </a:pPr>
-                      <a:r>
-                        <a:t>184</a:t>
-                      </a:r>
-                    </a:p>
-                  </a:txBody>
-                  <a:tcPr/>
-                </a:tc>
-                <a:tc>
-                  <a:txBody>
-                    <a:bodyPr/>
-                    <a:lstStyle/>
-                    <a:p>
-                      <a:pPr>
-                        <a:defRPr sz="1200"/>
-                      </a:pPr>
-                      <a:r>
-                        <a:t>2</a:t>
-                      </a:r>
-                    </a:p>
-                  </a:txBody>
-                  <a:tcPr/>
-                </a:tc>
-                <a:tc>
-                  <a:txBody>
-                    <a:bodyPr/>
-                    <a:lstStyle/>
-                    <a:p>
-                      <a:pPr>
-                        <a:defRPr sz="1200"/>
-                      </a:pPr>
-                      <a:r>
-                        <a:t>0</a:t>
-                      </a:r>
-                    </a:p>
-                  </a:txBody>
-                  <a:tcPr/>
-                </a:tc>
-                <a:tc>
-                  <a:txBody>
-                    <a:bodyPr/>
-                    <a:lstStyle/>
-                    <a:p>
-                      <a:pPr>
-                        <a:defRPr sz="1200"/>
-                      </a:pPr>
-                      <a:r>
-                        <a:t>存量14→184，55页+59页手动填入</a:t>
-                      </a:r>
-                    </a:p>
-                  </a:txBody>
-                  <a:tcPr/>
-                </a:tc>
-              </a:tr>
-              <a:tr h="411480">
-                <a:tc>
-                  <a:txBody>
-                    <a:bodyPr/>
-                    <a:lstStyle/>
-                    <a:p>
-                      <a:pPr>
-                        <a:defRPr sz="1200"/>
-                      </a:pPr>
-                      <a:r>
-                        <a:t>影石创新</a:t>
-                      </a:r>
-                    </a:p>
-                  </a:txBody>
-                  <a:tcPr/>
-                </a:tc>
-                <a:tc>
-                  <a:txBody>
-                    <a:bodyPr/>
-                    <a:lstStyle/>
-                    <a:p>
-                      <a:pPr>
-                        <a:defRPr sz="1200"/>
-                      </a:pPr>
-                      <a:r>
-                        <a:t>2</a:t>
-                      </a:r>
-                    </a:p>
-                  </a:txBody>
-                  <a:tcPr/>
-                </a:tc>
-                <a:tc>
-                  <a:txBody>
-                    <a:bodyPr/>
-                    <a:lstStyle/>
-                    <a:p>
-                      <a:pPr>
-                        <a:defRPr sz="1200"/>
-                      </a:pPr>
-                      <a:r>
-                        <a:t>65</a:t>
-                      </a:r>
-                    </a:p>
-                  </a:txBody>
-                  <a:tcPr/>
-                </a:tc>
-                <a:tc>
-                  <a:txBody>
-                    <a:bodyPr/>
-                    <a:lstStyle/>
-                    <a:p>
-                      <a:pPr>
-                        <a:defRPr sz="1200"/>
-                      </a:pPr>
-                      <a:r>
-                        <a:t>1</a:t>
-                      </a:r>
-                    </a:p>
-                  </a:txBody>
-                  <a:tcPr/>
-                </a:tc>
-                <a:tc>
-                  <a:txBody>
-                    <a:bodyPr/>
-                    <a:lstStyle/>
-                    <a:p>
-                      <a:pPr>
-                        <a:defRPr sz="1200"/>
-                      </a:pPr>
-                      <a:r>
-                        <a:t>0</a:t>
-                      </a:r>
-                    </a:p>
-                  </a:txBody>
-                  <a:tcPr/>
-                </a:tc>
-                <a:tc>
-                  <a:txBody>
-                    <a:bodyPr/>
-                    <a:lstStyle/>
-                    <a:p>
-                      <a:pPr>
-                        <a:defRPr sz="1200"/>
-                      </a:pPr>
-                      <a:r>
-                        <a:t>存量2→65，64+99页手动填入</a:t>
-                      </a:r>
-                    </a:p>
-                  </a:txBody>
-                  <a:tcPr/>
-                </a:tc>
-              </a:tr>
-              <a:tr h="411480">
-                <a:tc>
-                  <a:txBody>
-                    <a:bodyPr/>
-                    <a:lstStyle/>
-                    <a:p>
-                      <a:pPr>
-                        <a:defRPr sz="1200"/>
-                      </a:pPr>
-                      <a:r>
-                        <a:t>三协电机</a:t>
-                      </a:r>
-                    </a:p>
-                  </a:txBody>
-                  <a:tcPr/>
-                </a:tc>
-                <a:tc>
-                  <a:txBody>
-                    <a:bodyPr/>
-                    <a:lstStyle/>
-                    <a:p>
-                      <a:pPr>
-                        <a:defRPr sz="1200"/>
-                      </a:pPr>
-                      <a:r>
-                        <a:t>3</a:t>
-                      </a:r>
-                    </a:p>
-                  </a:txBody>
-                  <a:tcPr/>
-                </a:tc>
-                <a:tc>
-                  <a:txBody>
-                    <a:bodyPr/>
-                    <a:lstStyle/>
-                    <a:p>
-                      <a:pPr>
-                        <a:defRPr sz="1200"/>
-                      </a:pPr>
-                      <a:r>
-                        <a:t>37</a:t>
-                      </a:r>
-                    </a:p>
-                  </a:txBody>
-                  <a:tcPr/>
-                </a:tc>
-                <a:tc>
-                  <a:txBody>
-                    <a:bodyPr/>
-                    <a:lstStyle/>
-                    <a:p>
-                      <a:pPr>
-                        <a:defRPr sz="1200"/>
-                      </a:pPr>
-                      <a:r>
-                        <a:t>10</a:t>
-                      </a:r>
-                    </a:p>
-                  </a:txBody>
-                  <a:tcPr/>
-                </a:tc>
-                <a:tc>
-                  <a:txBody>
-                    <a:bodyPr/>
-                    <a:lstStyle/>
-                    <a:p>
-                      <a:pPr>
-                        <a:defRPr sz="1200"/>
-                      </a:pPr>
-                      <a:r>
-                        <a:t>0</a:t>
-                      </a:r>
-                    </a:p>
-                  </a:txBody>
-                  <a:tcPr/>
-                </a:tc>
-                <a:tc>
-                  <a:txBody>
-                    <a:bodyPr/>
-                    <a:lstStyle/>
-                    <a:p>
-                      <a:pPr>
-                        <a:defRPr sz="1200"/>
-                      </a:pPr>
-                      <a:r>
-                        <a:t>TOC定位，存量1→37</a:t>
-                      </a:r>
-                    </a:p>
-                  </a:txBody>
-                  <a:tcPr/>
-                </a:tc>
-              </a:tr>
-              <a:tr h="411480">
-                <a:tc>
-                  <a:txBody>
-                    <a:bodyPr/>
-                    <a:lstStyle/>
-                    <a:p>
-                      <a:pPr>
-                        <a:defRPr sz="1200"/>
-                      </a:pPr>
-                      <a:r>
-                        <a:t>黄山谷捷</a:t>
-                      </a:r>
-                    </a:p>
-                  </a:txBody>
-                  <a:tcPr/>
-                </a:tc>
-                <a:tc>
-                  <a:txBody>
-                    <a:bodyPr/>
-                    <a:lstStyle/>
-                    <a:p>
-                      <a:pPr>
-                        <a:defRPr sz="1200"/>
-                      </a:pPr>
-                      <a:r>
-                        <a:t>3</a:t>
-                      </a:r>
-                    </a:p>
-                  </a:txBody>
-                  <a:tcPr/>
-                </a:tc>
-                <a:tc>
-                  <a:txBody>
-                    <a:bodyPr/>
-                    <a:lstStyle/>
-                    <a:p>
-                      <a:pPr>
-                        <a:defRPr sz="1200"/>
-                      </a:pPr>
-                      <a:r>
-                        <a:t>24</a:t>
-                      </a:r>
-                    </a:p>
-                  </a:txBody>
-                  <a:tcPr/>
-                </a:tc>
-                <a:tc>
-                  <a:txBody>
-                    <a:bodyPr/>
-                    <a:lstStyle/>
-                    <a:p>
-                      <a:pPr>
-                        <a:defRPr sz="1200"/>
-                      </a:pPr>
-                      <a:r>
-                        <a:t>3</a:t>
-                      </a:r>
-                    </a:p>
-                  </a:txBody>
-                  <a:tcPr/>
-                </a:tc>
-                <a:tc>
-                  <a:txBody>
-                    <a:bodyPr/>
-                    <a:lstStyle/>
-                    <a:p>
-                      <a:pPr>
-                        <a:defRPr sz="1200"/>
-                      </a:pPr>
-                      <a:r>
-                        <a:t>0</a:t>
-                      </a:r>
-                    </a:p>
-                  </a:txBody>
-                  <a:tcPr/>
-                </a:tc>
-                <a:tc>
-                  <a:txBody>
-                    <a:bodyPr/>
-                    <a:lstStyle/>
-                    <a:p>
-                      <a:pPr>
-                        <a:defRPr sz="1200"/>
-                      </a:pPr>
-                      <a:r>
-                        <a:t>确认出资额=认购数量</a:t>
-                      </a:r>
-                    </a:p>
-                  </a:txBody>
-                  <a:tcPr/>
-                </a:tc>
-              </a:tr>
-              <a:tr h="411480">
-                <a:tc>
-                  <a:txBody>
-                    <a:bodyPr/>
-                    <a:lstStyle/>
-                    <a:p>
-                      <a:pPr>
-                        <a:defRPr sz="1200"/>
-                      </a:pPr>
-                      <a:r>
-                        <a:t>三联锻造</a:t>
-                      </a:r>
-                    </a:p>
-                  </a:txBody>
-                  <a:tcPr/>
-                </a:tc>
-                <a:tc>
-                  <a:txBody>
-                    <a:bodyPr/>
-                    <a:lstStyle/>
-                    <a:p>
-                      <a:pPr>
-                        <a:defRPr sz="1200"/>
-                      </a:pPr>
-                      <a:r>
-                        <a:t>1</a:t>
-                      </a:r>
-                    </a:p>
-                  </a:txBody>
-                  <a:tcPr/>
-                </a:tc>
-                <a:tc>
-                  <a:txBody>
-                    <a:bodyPr/>
-                    <a:lstStyle/>
-                    <a:p>
-                      <a:pPr>
-                        <a:defRPr sz="1200"/>
-                      </a:pPr>
-                      <a:r>
-                        <a:t>2</a:t>
-                      </a:r>
-                    </a:p>
-                  </a:txBody>
-                  <a:tcPr/>
-                </a:tc>
-                <a:tc>
-                  <a:txBody>
-                    <a:bodyPr/>
-                    <a:lstStyle/>
-                    <a:p>
-                      <a:pPr>
-                        <a:defRPr sz="1200"/>
-                      </a:pPr>
-                      <a:r>
-                        <a:t>3</a:t>
-                      </a:r>
-                    </a:p>
-                  </a:txBody>
-                  <a:tcPr/>
-                </a:tc>
-                <a:tc>
-                  <a:txBody>
-                    <a:bodyPr/>
-                    <a:lstStyle/>
-                    <a:p>
-                      <a:pPr>
-                        <a:defRPr sz="1200"/>
-                      </a:pPr>
-                      <a:r>
-                        <a:t>0</a:t>
-                      </a:r>
-                    </a:p>
-                  </a:txBody>
-                  <a:tcPr/>
-                </a:tc>
-                <a:tc>
-                  <a:txBody>
-                    <a:bodyPr/>
-                    <a:lstStyle/>
-                    <a:p>
-                      <a:pPr>
-                        <a:defRPr sz="1200"/>
-                      </a:pPr>
-                      <a:r>
-                        <a:t>TOC定位33-37页</a:t>
-                      </a:r>
-                    </a:p>
-                  </a:txBody>
-                  <a:tcPr/>
-                </a:tc>
-              </a:tr>
-              <a:tr h="411480">
-                <a:tc>
-                  <a:txBody>
-                    <a:bodyPr/>
-                    <a:lstStyle/>
-                    <a:p>
-                      <a:pPr>
-                        <a:defRPr sz="1200"/>
-                      </a:pPr>
-                      <a:r>
-                        <a:t>星图测控</a:t>
-                      </a:r>
-                    </a:p>
-                  </a:txBody>
-                  <a:tcPr/>
-                </a:tc>
-                <a:tc>
-                  <a:txBody>
-                    <a:bodyPr/>
-                    <a:lstStyle/>
-                    <a:p>
-                      <a:pPr>
-                        <a:defRPr sz="1200"/>
-                      </a:pPr>
-                      <a:r>
-                        <a:t>3</a:t>
-                      </a:r>
-                    </a:p>
-                  </a:txBody>
-                  <a:tcPr/>
-                </a:tc>
-                <a:tc>
-                  <a:txBody>
-                    <a:bodyPr/>
-                    <a:lstStyle/>
-                    <a:p>
-                      <a:pPr>
-                        <a:defRPr sz="1200"/>
-                      </a:pPr>
-                      <a:r>
-                        <a:t>11</a:t>
-                      </a:r>
-                    </a:p>
-                  </a:txBody>
-                  <a:tcPr/>
-                </a:tc>
-                <a:tc>
-                  <a:txBody>
-                    <a:bodyPr/>
-                    <a:lstStyle/>
-                    <a:p>
-                      <a:pPr>
-                        <a:defRPr sz="1200"/>
-                      </a:pPr>
-                      <a:r>
-                        <a:t>2</a:t>
-                      </a:r>
-                    </a:p>
-                  </a:txBody>
-                  <a:tcPr/>
-                </a:tc>
-                <a:tc>
-                  <a:txBody>
-                    <a:bodyPr/>
-                    <a:lstStyle/>
-                    <a:p>
-                      <a:pPr>
-                        <a:defRPr sz="1200"/>
-                      </a:pPr>
-                      <a:r>
-                        <a:t>0</a:t>
-                      </a:r>
-                    </a:p>
-                  </a:txBody>
-                  <a:tcPr/>
-                </a:tc>
-                <a:tc>
-                  <a:txBody>
-                    <a:bodyPr/>
-                    <a:lstStyle/>
-                    <a:p>
-                      <a:pPr>
-                        <a:defRPr sz="1200"/>
-                      </a:pPr>
-                      <a:r>
-                        <a:t>evidence提取修复</a:t>
-                      </a:r>
-                    </a:p>
-                  </a:txBody>
-                  <a:tcPr/>
-                </a:tc>
-              </a:tr>
-            </a:tbl>
-          </a:graphicData>
-        </a:graphic>
-      </p:graphicFrame>
+          <a:p>
+            <a:pPr>
+              <a:spcAft>
+                <a:spcPts val="600"/>
+              </a:spcAft>
+              <a:defRPr sz="1800"/>
+            </a:pPr>
+            <a:r>
+              <a:t>1. 扫描MinerU JSON前30页，找到目录页（通常第10页）</a:t>
+            </a:r>
+          </a:p>
+          <a:p>
+            <a:pPr>
+              <a:spcAft>
+                <a:spcPts val="600"/>
+              </a:spcAft>
+              <a:defRPr sz="1800"/>
+            </a:pPr>
+            <a:r>
+              <a:t>2. 正则提取：'第四节 发行人基本情况 ........... 30'</a:t>
+            </a:r>
+          </a:p>
+          <a:p>
+            <a:pPr>
+              <a:spcAft>
+                <a:spcPts val="600"/>
+              </a:spcAft>
+              <a:defRPr sz="1800"/>
+            </a:pPr>
+            <a:r>
+              <a:t>3. 找到下一节起始页作为边界（'第五节 业务和技术 ........... 87'）</a:t>
+            </a:r>
+          </a:p>
+          <a:p>
+            <a:pPr>
+              <a:spcAft>
+                <a:spcPts val="600"/>
+              </a:spcAft>
+              <a:defRPr sz="1800"/>
+            </a:pPr>
+            <a:r>
+              <a:t>4. 只提取第30-87页文本 → 精准命中目标章节</a:t>
+            </a:r>
+          </a:p>
+          <a:p>
+            <a:pPr>
+              <a:spcAft>
+                <a:spcPts val="600"/>
+              </a:spcAft>
+              <a:defRPr sz="1800"/>
+            </a:pPr>
+            <a:r>
+              <a:t>三协电机存量：1条→37条（原来提取的是错误页面的内容）</a:t>
+            </a:r>
+          </a:p>
+          <a:p>
+            <a:pPr>
+              <a:spcAft>
+                <a:spcPts val="600"/>
+              </a:spcAft>
+              <a:defRPr sz="1800"/>
+            </a:pPr>
+            <a:r>
+              <a:t>这个方法可以复用到任何招股书，不依赖人工经验判断</a:t>
+            </a:r>
+          </a:p>
+        </p:txBody>
+      </p:sp>
     </p:spTree>
   </p:cSld>
   <p:clrMapOvr>
@@ -4963,14 +4063,14 @@
           <a:lstStyle/>
           <a:p>
             <a:pPr>
-              <a:defRPr sz="3000" b="1">
+              <a:defRPr sz="2600" b="1">
                 <a:solidFill>
                   <a:srgbClr val="003366"/>
                 </a:solidFill>
               </a:defRPr>
             </a:pPr>
             <a:r>
-              <a:t>上周被批 → 本周全改</a:t>
+              <a:t>最终成果：8家公司全部完成</a:t>
             </a:r>
           </a:p>
         </p:txBody>
@@ -4990,115 +4090,955 @@
           <a:bodyPr/>
           <a:lstStyle/>
           <a:p/>
-          <a:p>
-            <a:pPr>
-              <a:spcAft>
-                <a:spcPts val="600"/>
-              </a:spcAft>
-              <a:defRPr sz="1800"/>
-            </a:pPr>
-            <a:r>
-              <a:t>上周老师评价：</a:t>
-            </a:r>
-          </a:p>
-          <a:p>
-            <a:pPr>
-              <a:spcAft>
-                <a:spcPts val="600"/>
-              </a:spcAft>
-              <a:defRPr sz="1800"/>
-            </a:pPr>
-            <a:r>
-              <a:t>  '提交规范但结果质量不足' '缺三联锻造' '没有和教师版本比对'</a:t>
-            </a:r>
-          </a:p>
-          <a:p>
-            <a:pPr>
-              <a:spcAft>
-                <a:spcPts val="600"/>
-              </a:spcAft>
-              <a:defRPr sz="1800"/>
-            </a:pPr>
-            <a:r>
-              <a:t>  '字段有缺失' '没有主动核验意识'</a:t>
-            </a:r>
-          </a:p>
-          <a:p>
-            <a:pPr>
-              <a:spcAft>
-                <a:spcPts val="600"/>
-              </a:spcAft>
-              <a:defRPr sz="1800"/>
-            </a:pPr>
-          </a:p>
-          <a:p>
-            <a:pPr>
-              <a:spcAft>
-                <a:spcPts val="600"/>
-              </a:spcAft>
-              <a:defRPr sz="1800"/>
-            </a:pPr>
-            <a:r>
-              <a:t>本周改进：</a:t>
-            </a:r>
-          </a:p>
-          <a:p>
-            <a:pPr>
-              <a:spcAft>
-                <a:spcPts val="600"/>
-              </a:spcAft>
-              <a:defRPr sz="1800"/>
-            </a:pPr>
-            <a:r>
-              <a:t>  三联锻造补齐 ✓  友升替换为教师黄金标准 ✓</a:t>
-            </a:r>
-          </a:p>
-          <a:p>
-            <a:pPr>
-              <a:spcAft>
-                <a:spcPts val="600"/>
-              </a:spcAft>
-              <a:defRPr sz="1800"/>
-            </a:pPr>
-            <a:r>
-              <a:t>  row_match逐行对比表 ✓  cross-check带48条数字 ✓</a:t>
-            </a:r>
-          </a:p>
-          <a:p>
-            <a:pPr>
-              <a:spcAft>
-                <a:spcPts val="600"/>
-              </a:spcAft>
-              <a:defRPr sz="1800"/>
-            </a:pPr>
-            <a:r>
-              <a:t>  全部null值清零（55认缴+438存量）✓</a:t>
-            </a:r>
-          </a:p>
-          <a:p>
-            <a:pPr>
-              <a:spcAft>
-                <a:spcPts val="600"/>
-              </a:spcAft>
-              <a:defRPr sz="1800"/>
-            </a:pPr>
-            <a:r>
-              <a:t>  manual_gold与auto_output分离 ✓  组内互查表 ✓</a:t>
-            </a:r>
-          </a:p>
-          <a:p>
-            <a:pPr>
-              <a:spcAft>
-                <a:spcPts val="600"/>
-              </a:spcAft>
-              <a:defRPr sz="1800"/>
-            </a:pPr>
-            <a:r>
-              <a:t>  prompt敏感性分析 ✓  error_analysis 10问 ✓</a:t>
-            </a:r>
-          </a:p>
-        </p:txBody>
-      </p:sp>
+        </p:txBody>
+      </p:sp>
+      <p:graphicFrame>
+        <p:nvGraphicFramePr>
+          <p:cNvPr id="4" name="Table 3"/>
+          <p:cNvGraphicFramePr>
+            <a:graphicFrameLocks noGrp="1"/>
+          </p:cNvGraphicFramePr>
+          <p:nvPr/>
+        </p:nvGraphicFramePr>
+        <p:xfrm>
+          <a:off x="457200" y="1280160"/>
+          <a:ext cx="11247120" cy="3840480"/>
+        </p:xfrm>
+        <a:graphic>
+          <a:graphicData uri="http://schemas.openxmlformats.org/drawingml/2006/table">
+            <a:tbl>
+              <a:tblPr firstRow="1" bandRow="1">
+                <a:tableStyleId>{5C22544A-7EE6-4342-B048-85BDC9FD1C3A}</a:tableStyleId>
+              </a:tblPr>
+              <a:tblGrid>
+                <a:gridCol w="1874520"/>
+                <a:gridCol w="1874520"/>
+                <a:gridCol w="1874520"/>
+                <a:gridCol w="1874520"/>
+                <a:gridCol w="1874520"/>
+                <a:gridCol w="1874520"/>
+              </a:tblGrid>
+              <a:tr h="384048">
+                <a:tc>
+                  <a:txBody>
+                    <a:bodyPr/>
+                    <a:lstStyle/>
+                    <a:p>
+                      <a:pPr>
+                        <a:defRPr sz="1200" b="1"/>
+                      </a:pPr>
+                      <a:r>
+                        <a:t>公司</a:t>
+                      </a:r>
+                    </a:p>
+                  </a:txBody>
+                  <a:tcPr/>
+                </a:tc>
+                <a:tc>
+                  <a:txBody>
+                    <a:bodyPr/>
+                    <a:lstStyle/>
+                    <a:p>
+                      <a:pPr>
+                        <a:defRPr sz="1200" b="1"/>
+                      </a:pPr>
+                      <a:r>
+                        <a:t>认缴</a:t>
+                      </a:r>
+                    </a:p>
+                  </a:txBody>
+                  <a:tcPr/>
+                </a:tc>
+                <a:tc>
+                  <a:txBody>
+                    <a:bodyPr/>
+                    <a:lstStyle/>
+                    <a:p>
+                      <a:pPr>
+                        <a:defRPr sz="1200" b="1"/>
+                      </a:pPr>
+                      <a:r>
+                        <a:t>存量</a:t>
+                      </a:r>
+                    </a:p>
+                  </a:txBody>
+                  <a:tcPr/>
+                </a:tc>
+                <a:tc>
+                  <a:txBody>
+                    <a:bodyPr/>
+                    <a:lstStyle/>
+                    <a:p>
+                      <a:pPr>
+                        <a:defRPr sz="1200" b="1"/>
+                      </a:pPr>
+                      <a:r>
+                        <a:t>转让</a:t>
+                      </a:r>
+                    </a:p>
+                  </a:txBody>
+                  <a:tcPr/>
+                </a:tc>
+                <a:tc>
+                  <a:txBody>
+                    <a:bodyPr/>
+                    <a:lstStyle/>
+                    <a:p>
+                      <a:pPr>
+                        <a:defRPr sz="1200" b="1"/>
+                      </a:pPr>
+                      <a:r>
+                        <a:t>null</a:t>
+                      </a:r>
+                    </a:p>
+                  </a:txBody>
+                  <a:tcPr/>
+                </a:tc>
+                <a:tc>
+                  <a:txBody>
+                    <a:bodyPr/>
+                    <a:lstStyle/>
+                    <a:p>
+                      <a:pPr>
+                        <a:defRPr sz="1200" b="1"/>
+                      </a:pPr>
+                      <a:r>
+                        <a:t>备注</a:t>
+                      </a:r>
+                    </a:p>
+                  </a:txBody>
+                  <a:tcPr/>
+                </a:tc>
+              </a:tr>
+              <a:tr h="384048">
+                <a:tc>
+                  <a:txBody>
+                    <a:bodyPr/>
+                    <a:lstStyle/>
+                    <a:p>
+                      <a:pPr>
+                        <a:defRPr sz="1100"/>
+                      </a:pPr>
+                      <a:r>
+                        <a:t>友升股份</a:t>
+                      </a:r>
+                    </a:p>
+                  </a:txBody>
+                  <a:tcPr/>
+                </a:tc>
+                <a:tc>
+                  <a:txBody>
+                    <a:bodyPr/>
+                    <a:lstStyle/>
+                    <a:p>
+                      <a:pPr>
+                        <a:defRPr sz="1100"/>
+                      </a:pPr>
+                      <a:r>
+                        <a:t>13</a:t>
+                      </a:r>
+                    </a:p>
+                  </a:txBody>
+                  <a:tcPr/>
+                </a:tc>
+                <a:tc>
+                  <a:txBody>
+                    <a:bodyPr/>
+                    <a:lstStyle/>
+                    <a:p>
+                      <a:pPr>
+                        <a:defRPr sz="1100"/>
+                      </a:pPr>
+                      <a:r>
+                        <a:t>28</a:t>
+                      </a:r>
+                    </a:p>
+                  </a:txBody>
+                  <a:tcPr/>
+                </a:tc>
+                <a:tc>
+                  <a:txBody>
+                    <a:bodyPr/>
+                    <a:lstStyle/>
+                    <a:p>
+                      <a:pPr>
+                        <a:defRPr sz="1100"/>
+                      </a:pPr>
+                      <a:r>
+                        <a:t>5</a:t>
+                      </a:r>
+                    </a:p>
+                  </a:txBody>
+                  <a:tcPr/>
+                </a:tc>
+                <a:tc>
+                  <a:txBody>
+                    <a:bodyPr/>
+                    <a:lstStyle/>
+                    <a:p>
+                      <a:pPr>
+                        <a:defRPr sz="1100"/>
+                      </a:pPr>
+                      <a:r>
+                        <a:t>0</a:t>
+                      </a:r>
+                    </a:p>
+                  </a:txBody>
+                  <a:tcPr/>
+                </a:tc>
+                <a:tc>
+                  <a:txBody>
+                    <a:bodyPr/>
+                    <a:lstStyle/>
+                    <a:p>
+                      <a:pPr>
+                        <a:defRPr sz="1100"/>
+                      </a:pPr>
+                      <a:r>
+                        <a:t>教师gold，2020年3笔完全匹配</a:t>
+                      </a:r>
+                    </a:p>
+                  </a:txBody>
+                  <a:tcPr/>
+                </a:tc>
+              </a:tr>
+              <a:tr h="384048">
+                <a:tc>
+                  <a:txBody>
+                    <a:bodyPr/>
+                    <a:lstStyle/>
+                    <a:p>
+                      <a:pPr>
+                        <a:defRPr sz="1100"/>
+                      </a:pPr>
+                      <a:r>
+                        <a:t>云汉芯城</a:t>
+                      </a:r>
+                    </a:p>
+                  </a:txBody>
+                  <a:tcPr/>
+                </a:tc>
+                <a:tc>
+                  <a:txBody>
+                    <a:bodyPr/>
+                    <a:lstStyle/>
+                    <a:p>
+                      <a:pPr>
+                        <a:defRPr sz="1100"/>
+                      </a:pPr>
+                      <a:r>
+                        <a:t>15</a:t>
+                      </a:r>
+                    </a:p>
+                  </a:txBody>
+                  <a:tcPr/>
+                </a:tc>
+                <a:tc>
+                  <a:txBody>
+                    <a:bodyPr/>
+                    <a:lstStyle/>
+                    <a:p>
+                      <a:pPr>
+                        <a:defRPr sz="1100"/>
+                      </a:pPr>
+                      <a:r>
+                        <a:t>87</a:t>
+                      </a:r>
+                    </a:p>
+                  </a:txBody>
+                  <a:tcPr/>
+                </a:tc>
+                <a:tc>
+                  <a:txBody>
+                    <a:bodyPr/>
+                    <a:lstStyle/>
+                    <a:p>
+                      <a:pPr>
+                        <a:defRPr sz="1100"/>
+                      </a:pPr>
+                      <a:r>
+                        <a:t>8</a:t>
+                      </a:r>
+                    </a:p>
+                  </a:txBody>
+                  <a:tcPr/>
+                </a:tc>
+                <a:tc>
+                  <a:txBody>
+                    <a:bodyPr/>
+                    <a:lstStyle/>
+                    <a:p>
+                      <a:pPr>
+                        <a:defRPr sz="1100"/>
+                      </a:pPr>
+                      <a:r>
+                        <a:t>0</a:t>
+                      </a:r>
+                    </a:p>
+                  </a:txBody>
+                  <a:tcPr/>
+                </a:tc>
+                <a:tc>
+                  <a:txBody>
+                    <a:bodyPr/>
+                    <a:lstStyle/>
+                    <a:p>
+                      <a:pPr>
+                        <a:defRPr sz="1100"/>
+                      </a:pPr>
+                      <a:r>
+                        <a:t>数据最完整</a:t>
+                      </a:r>
+                    </a:p>
+                  </a:txBody>
+                  <a:tcPr/>
+                </a:tc>
+              </a:tr>
+              <a:tr h="384048">
+                <a:tc>
+                  <a:txBody>
+                    <a:bodyPr/>
+                    <a:lstStyle/>
+                    <a:p>
+                      <a:pPr>
+                        <a:defRPr sz="1100"/>
+                      </a:pPr>
+                      <a:r>
+                        <a:t>赛分科技</a:t>
+                      </a:r>
+                    </a:p>
+                  </a:txBody>
+                  <a:tcPr/>
+                </a:tc>
+                <a:tc>
+                  <a:txBody>
+                    <a:bodyPr/>
+                    <a:lstStyle/>
+                    <a:p>
+                      <a:pPr>
+                        <a:defRPr sz="1100"/>
+                      </a:pPr>
+                      <a:r>
+                        <a:t>15</a:t>
+                      </a:r>
+                    </a:p>
+                  </a:txBody>
+                  <a:tcPr/>
+                </a:tc>
+                <a:tc>
+                  <a:txBody>
+                    <a:bodyPr/>
+                    <a:lstStyle/>
+                    <a:p>
+                      <a:pPr>
+                        <a:defRPr sz="1100"/>
+                      </a:pPr>
+                      <a:r>
+                        <a:t>184</a:t>
+                      </a:r>
+                    </a:p>
+                  </a:txBody>
+                  <a:tcPr/>
+                </a:tc>
+                <a:tc>
+                  <a:txBody>
+                    <a:bodyPr/>
+                    <a:lstStyle/>
+                    <a:p>
+                      <a:pPr>
+                        <a:defRPr sz="1100"/>
+                      </a:pPr>
+                      <a:r>
+                        <a:t>2</a:t>
+                      </a:r>
+                    </a:p>
+                  </a:txBody>
+                  <a:tcPr/>
+                </a:tc>
+                <a:tc>
+                  <a:txBody>
+                    <a:bodyPr/>
+                    <a:lstStyle/>
+                    <a:p>
+                      <a:pPr>
+                        <a:defRPr sz="1100"/>
+                      </a:pPr>
+                      <a:r>
+                        <a:t>0</a:t>
+                      </a:r>
+                    </a:p>
+                  </a:txBody>
+                  <a:tcPr/>
+                </a:tc>
+                <a:tc>
+                  <a:txBody>
+                    <a:bodyPr/>
+                    <a:lstStyle/>
+                    <a:p>
+                      <a:pPr>
+                        <a:defRPr sz="1100"/>
+                      </a:pPr>
+                      <a:r>
+                        <a:t>存量14→184，人工填入</a:t>
+                      </a:r>
+                    </a:p>
+                  </a:txBody>
+                  <a:tcPr/>
+                </a:tc>
+              </a:tr>
+              <a:tr h="384048">
+                <a:tc>
+                  <a:txBody>
+                    <a:bodyPr/>
+                    <a:lstStyle/>
+                    <a:p>
+                      <a:pPr>
+                        <a:defRPr sz="1100"/>
+                      </a:pPr>
+                      <a:r>
+                        <a:t>影石创新</a:t>
+                      </a:r>
+                    </a:p>
+                  </a:txBody>
+                  <a:tcPr/>
+                </a:tc>
+                <a:tc>
+                  <a:txBody>
+                    <a:bodyPr/>
+                    <a:lstStyle/>
+                    <a:p>
+                      <a:pPr>
+                        <a:defRPr sz="1100"/>
+                      </a:pPr>
+                      <a:r>
+                        <a:t>2</a:t>
+                      </a:r>
+                    </a:p>
+                  </a:txBody>
+                  <a:tcPr/>
+                </a:tc>
+                <a:tc>
+                  <a:txBody>
+                    <a:bodyPr/>
+                    <a:lstStyle/>
+                    <a:p>
+                      <a:pPr>
+                        <a:defRPr sz="1100"/>
+                      </a:pPr>
+                      <a:r>
+                        <a:t>65</a:t>
+                      </a:r>
+                    </a:p>
+                  </a:txBody>
+                  <a:tcPr/>
+                </a:tc>
+                <a:tc>
+                  <a:txBody>
+                    <a:bodyPr/>
+                    <a:lstStyle/>
+                    <a:p>
+                      <a:pPr>
+                        <a:defRPr sz="1100"/>
+                      </a:pPr>
+                      <a:r>
+                        <a:t>1</a:t>
+                      </a:r>
+                    </a:p>
+                  </a:txBody>
+                  <a:tcPr/>
+                </a:tc>
+                <a:tc>
+                  <a:txBody>
+                    <a:bodyPr/>
+                    <a:lstStyle/>
+                    <a:p>
+                      <a:pPr>
+                        <a:defRPr sz="1100"/>
+                      </a:pPr>
+                      <a:r>
+                        <a:t>0</a:t>
+                      </a:r>
+                    </a:p>
+                  </a:txBody>
+                  <a:tcPr/>
+                </a:tc>
+                <a:tc>
+                  <a:txBody>
+                    <a:bodyPr/>
+                    <a:lstStyle/>
+                    <a:p>
+                      <a:pPr>
+                        <a:defRPr sz="1100"/>
+                      </a:pPr>
+                      <a:r>
+                        <a:t>存量2→65，人工填入</a:t>
+                      </a:r>
+                    </a:p>
+                  </a:txBody>
+                  <a:tcPr/>
+                </a:tc>
+              </a:tr>
+              <a:tr h="384048">
+                <a:tc>
+                  <a:txBody>
+                    <a:bodyPr/>
+                    <a:lstStyle/>
+                    <a:p>
+                      <a:pPr>
+                        <a:defRPr sz="1100"/>
+                      </a:pPr>
+                      <a:r>
+                        <a:t>三协电机</a:t>
+                      </a:r>
+                    </a:p>
+                  </a:txBody>
+                  <a:tcPr/>
+                </a:tc>
+                <a:tc>
+                  <a:txBody>
+                    <a:bodyPr/>
+                    <a:lstStyle/>
+                    <a:p>
+                      <a:pPr>
+                        <a:defRPr sz="1100"/>
+                      </a:pPr>
+                      <a:r>
+                        <a:t>3</a:t>
+                      </a:r>
+                    </a:p>
+                  </a:txBody>
+                  <a:tcPr/>
+                </a:tc>
+                <a:tc>
+                  <a:txBody>
+                    <a:bodyPr/>
+                    <a:lstStyle/>
+                    <a:p>
+                      <a:pPr>
+                        <a:defRPr sz="1100"/>
+                      </a:pPr>
+                      <a:r>
+                        <a:t>37</a:t>
+                      </a:r>
+                    </a:p>
+                  </a:txBody>
+                  <a:tcPr/>
+                </a:tc>
+                <a:tc>
+                  <a:txBody>
+                    <a:bodyPr/>
+                    <a:lstStyle/>
+                    <a:p>
+                      <a:pPr>
+                        <a:defRPr sz="1100"/>
+                      </a:pPr>
+                      <a:r>
+                        <a:t>10</a:t>
+                      </a:r>
+                    </a:p>
+                  </a:txBody>
+                  <a:tcPr/>
+                </a:tc>
+                <a:tc>
+                  <a:txBody>
+                    <a:bodyPr/>
+                    <a:lstStyle/>
+                    <a:p>
+                      <a:pPr>
+                        <a:defRPr sz="1100"/>
+                      </a:pPr>
+                      <a:r>
+                        <a:t>0</a:t>
+                      </a:r>
+                    </a:p>
+                  </a:txBody>
+                  <a:tcPr/>
+                </a:tc>
+                <a:tc>
+                  <a:txBody>
+                    <a:bodyPr/>
+                    <a:lstStyle/>
+                    <a:p>
+                      <a:pPr>
+                        <a:defRPr sz="1100"/>
+                      </a:pPr>
+                      <a:r>
+                        <a:t>TOC定位修复</a:t>
+                      </a:r>
+                    </a:p>
+                  </a:txBody>
+                  <a:tcPr/>
+                </a:tc>
+              </a:tr>
+              <a:tr h="384048">
+                <a:tc>
+                  <a:txBody>
+                    <a:bodyPr/>
+                    <a:lstStyle/>
+                    <a:p>
+                      <a:pPr>
+                        <a:defRPr sz="1100"/>
+                      </a:pPr>
+                      <a:r>
+                        <a:t>黄山谷捷</a:t>
+                      </a:r>
+                    </a:p>
+                  </a:txBody>
+                  <a:tcPr/>
+                </a:tc>
+                <a:tc>
+                  <a:txBody>
+                    <a:bodyPr/>
+                    <a:lstStyle/>
+                    <a:p>
+                      <a:pPr>
+                        <a:defRPr sz="1100"/>
+                      </a:pPr>
+                      <a:r>
+                        <a:t>3</a:t>
+                      </a:r>
+                    </a:p>
+                  </a:txBody>
+                  <a:tcPr/>
+                </a:tc>
+                <a:tc>
+                  <a:txBody>
+                    <a:bodyPr/>
+                    <a:lstStyle/>
+                    <a:p>
+                      <a:pPr>
+                        <a:defRPr sz="1100"/>
+                      </a:pPr>
+                      <a:r>
+                        <a:t>24</a:t>
+                      </a:r>
+                    </a:p>
+                  </a:txBody>
+                  <a:tcPr/>
+                </a:tc>
+                <a:tc>
+                  <a:txBody>
+                    <a:bodyPr/>
+                    <a:lstStyle/>
+                    <a:p>
+                      <a:pPr>
+                        <a:defRPr sz="1100"/>
+                      </a:pPr>
+                      <a:r>
+                        <a:t>3</a:t>
+                      </a:r>
+                    </a:p>
+                  </a:txBody>
+                  <a:tcPr/>
+                </a:tc>
+                <a:tc>
+                  <a:txBody>
+                    <a:bodyPr/>
+                    <a:lstStyle/>
+                    <a:p>
+                      <a:pPr>
+                        <a:defRPr sz="1100"/>
+                      </a:pPr>
+                      <a:r>
+                        <a:t>0</a:t>
+                      </a:r>
+                    </a:p>
+                  </a:txBody>
+                  <a:tcPr/>
+                </a:tc>
+                <a:tc>
+                  <a:txBody>
+                    <a:bodyPr/>
+                    <a:lstStyle/>
+                    <a:p>
+                      <a:pPr>
+                        <a:defRPr sz="1100"/>
+                      </a:pPr>
+                      <a:r>
+                        <a:t>确认有限责任公司特点</a:t>
+                      </a:r>
+                    </a:p>
+                  </a:txBody>
+                  <a:tcPr/>
+                </a:tc>
+              </a:tr>
+              <a:tr h="384048">
+                <a:tc>
+                  <a:txBody>
+                    <a:bodyPr/>
+                    <a:lstStyle/>
+                    <a:p>
+                      <a:pPr>
+                        <a:defRPr sz="1100"/>
+                      </a:pPr>
+                      <a:r>
+                        <a:t>三联锻造</a:t>
+                      </a:r>
+                    </a:p>
+                  </a:txBody>
+                  <a:tcPr/>
+                </a:tc>
+                <a:tc>
+                  <a:txBody>
+                    <a:bodyPr/>
+                    <a:lstStyle/>
+                    <a:p>
+                      <a:pPr>
+                        <a:defRPr sz="1100"/>
+                      </a:pPr>
+                      <a:r>
+                        <a:t>1</a:t>
+                      </a:r>
+                    </a:p>
+                  </a:txBody>
+                  <a:tcPr/>
+                </a:tc>
+                <a:tc>
+                  <a:txBody>
+                    <a:bodyPr/>
+                    <a:lstStyle/>
+                    <a:p>
+                      <a:pPr>
+                        <a:defRPr sz="1100"/>
+                      </a:pPr>
+                      <a:r>
+                        <a:t>2</a:t>
+                      </a:r>
+                    </a:p>
+                  </a:txBody>
+                  <a:tcPr/>
+                </a:tc>
+                <a:tc>
+                  <a:txBody>
+                    <a:bodyPr/>
+                    <a:lstStyle/>
+                    <a:p>
+                      <a:pPr>
+                        <a:defRPr sz="1100"/>
+                      </a:pPr>
+                      <a:r>
+                        <a:t>3</a:t>
+                      </a:r>
+                    </a:p>
+                  </a:txBody>
+                  <a:tcPr/>
+                </a:tc>
+                <a:tc>
+                  <a:txBody>
+                    <a:bodyPr/>
+                    <a:lstStyle/>
+                    <a:p>
+                      <a:pPr>
+                        <a:defRPr sz="1100"/>
+                      </a:pPr>
+                      <a:r>
+                        <a:t>0</a:t>
+                      </a:r>
+                    </a:p>
+                  </a:txBody>
+                  <a:tcPr/>
+                </a:tc>
+                <a:tc>
+                  <a:txBody>
+                    <a:bodyPr/>
+                    <a:lstStyle/>
+                    <a:p>
+                      <a:pPr>
+                        <a:defRPr sz="1100"/>
+                      </a:pPr>
+                      <a:r>
+                        <a:t>TOC精准定位33-37页</a:t>
+                      </a:r>
+                    </a:p>
+                  </a:txBody>
+                  <a:tcPr/>
+                </a:tc>
+              </a:tr>
+              <a:tr h="384048">
+                <a:tc>
+                  <a:txBody>
+                    <a:bodyPr/>
+                    <a:lstStyle/>
+                    <a:p>
+                      <a:pPr>
+                        <a:defRPr sz="1100"/>
+                      </a:pPr>
+                      <a:r>
+                        <a:t>星图测控</a:t>
+                      </a:r>
+                    </a:p>
+                  </a:txBody>
+                  <a:tcPr/>
+                </a:tc>
+                <a:tc>
+                  <a:txBody>
+                    <a:bodyPr/>
+                    <a:lstStyle/>
+                    <a:p>
+                      <a:pPr>
+                        <a:defRPr sz="1100"/>
+                      </a:pPr>
+                      <a:r>
+                        <a:t>3</a:t>
+                      </a:r>
+                    </a:p>
+                  </a:txBody>
+                  <a:tcPr/>
+                </a:tc>
+                <a:tc>
+                  <a:txBody>
+                    <a:bodyPr/>
+                    <a:lstStyle/>
+                    <a:p>
+                      <a:pPr>
+                        <a:defRPr sz="1100"/>
+                      </a:pPr>
+                      <a:r>
+                        <a:t>11</a:t>
+                      </a:r>
+                    </a:p>
+                  </a:txBody>
+                  <a:tcPr/>
+                </a:tc>
+                <a:tc>
+                  <a:txBody>
+                    <a:bodyPr/>
+                    <a:lstStyle/>
+                    <a:p>
+                      <a:pPr>
+                        <a:defRPr sz="1100"/>
+                      </a:pPr>
+                      <a:r>
+                        <a:t>2</a:t>
+                      </a:r>
+                    </a:p>
+                  </a:txBody>
+                  <a:tcPr/>
+                </a:tc>
+                <a:tc>
+                  <a:txBody>
+                    <a:bodyPr/>
+                    <a:lstStyle/>
+                    <a:p>
+                      <a:pPr>
+                        <a:defRPr sz="1100"/>
+                      </a:pPr>
+                      <a:r>
+                        <a:t>0</a:t>
+                      </a:r>
+                    </a:p>
+                  </a:txBody>
+                  <a:tcPr/>
+                </a:tc>
+                <a:tc>
+                  <a:txBody>
+                    <a:bodyPr/>
+                    <a:lstStyle/>
+                    <a:p>
+                      <a:pPr>
+                        <a:defRPr sz="1100"/>
+                      </a:pPr>
+                      <a:r>
+                        <a:t>evidence提取修复</a:t>
+                      </a:r>
+                    </a:p>
+                  </a:txBody>
+                  <a:tcPr/>
+                </a:tc>
+              </a:tr>
+              <a:tr h="384048">
+                <a:tc>
+                  <a:txBody>
+                    <a:bodyPr/>
+                    <a:lstStyle/>
+                    <a:p>
+                      <a:pPr>
+                        <a:defRPr sz="1100"/>
+                      </a:pPr>
+                      <a:r>
+                        <a:t>合计</a:t>
+                      </a:r>
+                    </a:p>
+                  </a:txBody>
+                  <a:tcPr/>
+                </a:tc>
+                <a:tc>
+                  <a:txBody>
+                    <a:bodyPr/>
+                    <a:lstStyle/>
+                    <a:p>
+                      <a:pPr>
+                        <a:defRPr sz="1100"/>
+                      </a:pPr>
+                      <a:r>
+                        <a:t>55</a:t>
+                      </a:r>
+                    </a:p>
+                  </a:txBody>
+                  <a:tcPr/>
+                </a:tc>
+                <a:tc>
+                  <a:txBody>
+                    <a:bodyPr/>
+                    <a:lstStyle/>
+                    <a:p>
+                      <a:pPr>
+                        <a:defRPr sz="1100"/>
+                      </a:pPr>
+                      <a:r>
+                        <a:t>438</a:t>
+                      </a:r>
+                    </a:p>
+                  </a:txBody>
+                  <a:tcPr/>
+                </a:tc>
+                <a:tc>
+                  <a:txBody>
+                    <a:bodyPr/>
+                    <a:lstStyle/>
+                    <a:p>
+                      <a:pPr>
+                        <a:defRPr sz="1100"/>
+                      </a:pPr>
+                      <a:r>
+                        <a:t>34</a:t>
+                      </a:r>
+                    </a:p>
+                  </a:txBody>
+                  <a:tcPr/>
+                </a:tc>
+                <a:tc>
+                  <a:txBody>
+                    <a:bodyPr/>
+                    <a:lstStyle/>
+                    <a:p>
+                      <a:pPr>
+                        <a:defRPr sz="1100"/>
+                      </a:pPr>
+                      <a:r>
+                        <a:t>0</a:t>
+                      </a:r>
+                    </a:p>
+                  </a:txBody>
+                  <a:tcPr/>
+                </a:tc>
+                <a:tc>
+                  <a:txBody>
+                    <a:bodyPr/>
+                    <a:lstStyle/>
+                    <a:p>
+                      <a:pPr>
+                        <a:defRPr sz="1100"/>
+                      </a:pPr>
+                    </a:p>
+                  </a:txBody>
+                  <a:tcPr/>
+                </a:tc>
+              </a:tr>
+            </a:tbl>
+          </a:graphicData>
+        </a:graphic>
+      </p:graphicFrame>
     </p:spTree>
   </p:cSld>
   <p:clrMapOvr>
@@ -5140,7 +5080,7 @@
               </a:defRPr>
             </a:pPr>
             <a:r>
-              <a:t>三周的数据</a:t>
+              <a:t>上周被批 → 本周全改</a:t>
             </a:r>
           </a:p>
         </p:txBody>
@@ -5168,7 +5108,7 @@
               <a:defRPr sz="1800"/>
             </a:pPr>
             <a:r>
-              <a:t>代码提交：15+ commits，累计处理 ~2000 行代码</a:t>
+              <a:t>上周老师评价：'提交规范但结果质量不足' '缺三联锻造' '没有和教师版本比对' '字段有缺失，没有主动核验意识'</a:t>
             </a:r>
           </a:p>
           <a:p>
@@ -5178,9 +5118,6 @@
               </a:spcAft>
               <a:defRPr sz="1800"/>
             </a:pPr>
-            <a:r>
-              <a:t>Deepseek API调用：30+ 次，累计消耗 ~800K tokens</a:t>
-            </a:r>
           </a:p>
           <a:p>
             <a:pPr>
@@ -5190,7 +5127,7 @@
               <a:defRPr sz="1800"/>
             </a:pPr>
             <a:r>
-              <a:t>null值变化：Week2 初始 ~100个 → 本周最终 0个</a:t>
+              <a:t>本周全部改进：</a:t>
             </a:r>
           </a:p>
           <a:p>
@@ -5201,7 +5138,7 @@
               <a:defRPr sz="1800"/>
             </a:pPr>
             <a:r>
-              <a:t>股权存量：从Week1的 ~200条 → 本周438条</a:t>
+              <a:t>三联锻造补齐 ✓  友升替换为教师黄金标准 ✓</a:t>
             </a:r>
           </a:p>
           <a:p>
@@ -5212,7 +5149,7 @@
               <a:defRPr sz="1800"/>
             </a:pPr>
             <a:r>
-              <a:t>MinerU上传：总计20+ 次，报废率 ~50%（页码范围填错的都废了）</a:t>
+              <a:t>row_match逐行对比表 ✓  cross-check带48条数字 ✓</a:t>
             </a:r>
           </a:p>
           <a:p>
@@ -5223,7 +5160,7 @@
               <a:defRPr sz="1800"/>
             </a:pPr>
             <a:r>
-              <a:t>人工填表：赛分2页 + 影石2页，Markdown模板秒转JSONL</a:t>
+              <a:t>全部null值清零（55认缴+438存量）✓</a:t>
             </a:r>
           </a:p>
           <a:p>
@@ -5233,6 +5170,9 @@
               </a:spcAft>
               <a:defRPr sz="1800"/>
             </a:pPr>
+            <a:r>
+              <a:t>manual_gold与auto_output分离 ✓  组内互查表 ✓</a:t>
+            </a:r>
           </a:p>
           <a:p>
             <a:pPr>
@@ -5242,7 +5182,7 @@
               <a:defRPr sz="1800"/>
             </a:pPr>
             <a:r>
-              <a:t>最大教训：MinerU页码范围就是数据质量的硬上限，填错了后面全白干</a:t>
+              <a:t>prompt敏感性分析 ✓  error_analysis 10问 ✓</a:t>
             </a:r>
           </a:p>
         </p:txBody>
